--- a/03-课件PPT/讲次版/第2章-4-讲次 2-4 · MCP 协议与接入.pptx
+++ b/03-课件PPT/讲次版/第2章-4-讲次 2-4 · MCP 协议与接入.pptx
@@ -4650,7 +4650,7 @@
                 </a:solidFill>
                 <a:latin typeface="PingFang SC"/>
               </a:rPr>
-              <a:t>预置提示模板|一个 Server 同时暴露三类</a:t>
+              <a:t>预置提示模板</a:t>
             </a:r>
           </a:p>
         </p:txBody>
@@ -5921,106 +5921,14 @@
       </p:sp>
       <p:sp>
         <p:nvSpPr>
-          <p:cNvPr id="6" name="Rounded Rectangle 5"/>
-          <p:cNvSpPr/>
-          <p:nvPr/>
-        </p:nvSpPr>
-        <p:spPr>
-          <a:xfrm>
-            <a:off x="1905000" y="952500"/>
-            <a:ext cx="8763000" cy="1023937"/>
-          </a:xfrm>
-          <a:prstGeom prst="roundRect">
-            <a:avLst>
-              <a:gd name="adj" fmla="val 8000"/>
-            </a:avLst>
-          </a:prstGeom>
-          <a:solidFill>
-            <a:srgbClr val="FFFFFF"/>
-          </a:solidFill>
-          <a:ln w="12700">
-            <a:solidFill>
-              <a:srgbClr val="2563EB"/>
-            </a:solidFill>
-          </a:ln>
-          <a:effectLst/>
-        </p:spPr>
-        <p:style>
-          <a:lnRef idx="1">
-            <a:schemeClr val="accent1"/>
-          </a:lnRef>
-          <a:fillRef idx="3">
-            <a:schemeClr val="accent1"/>
-          </a:fillRef>
-          <a:effectRef idx="2">
-            <a:schemeClr val="accent1"/>
-          </a:effectRef>
-          <a:fontRef idx="minor">
-            <a:schemeClr val="lt1"/>
-          </a:fontRef>
-        </p:style>
-        <p:txBody>
-          <a:bodyPr rtlCol="0" anchor="ctr"/>
-          <a:lstStyle/>
-          <a:p>
-            <a:pPr algn="ctr"/>
-          </a:p>
-        </p:txBody>
-      </p:sp>
-      <p:sp>
-        <p:nvSpPr>
-          <p:cNvPr id="7" name="Rectangle 6"/>
-          <p:cNvSpPr/>
-          <p:nvPr/>
-        </p:nvSpPr>
-        <p:spPr>
-          <a:xfrm>
-            <a:off x="1905000" y="952500"/>
-            <a:ext cx="47625" cy="1023937"/>
-          </a:xfrm>
-          <a:prstGeom prst="rect">
-            <a:avLst/>
-          </a:prstGeom>
-          <a:solidFill>
-            <a:srgbClr val="2563EB"/>
-          </a:solidFill>
-          <a:ln>
-            <a:noFill/>
-          </a:ln>
-          <a:effectLst/>
-        </p:spPr>
-        <p:style>
-          <a:lnRef idx="1">
-            <a:schemeClr val="accent1"/>
-          </a:lnRef>
-          <a:fillRef idx="3">
-            <a:schemeClr val="accent1"/>
-          </a:fillRef>
-          <a:effectRef idx="2">
-            <a:schemeClr val="accent1"/>
-          </a:effectRef>
-          <a:fontRef idx="minor">
-            <a:schemeClr val="lt1"/>
-          </a:fontRef>
-        </p:style>
-        <p:txBody>
-          <a:bodyPr rtlCol="0" anchor="ctr"/>
-          <a:lstStyle/>
-          <a:p>
-            <a:pPr algn="ctr"/>
-          </a:p>
-        </p:txBody>
-      </p:sp>
-      <p:sp>
-        <p:nvSpPr>
-          <p:cNvPr id="8" name="TextBox 7"/>
+          <p:cNvPr id="6" name="TextBox 5"/>
           <p:cNvSpPr txBox="1"/>
           <p:nvPr/>
         </p:nvSpPr>
         <p:spPr>
           <a:xfrm>
-            <a:off x="2038350" y="952500"/>
-            <a:ext cx="8534400" cy="1023937"/>
+            <a:off x="1962150" y="685800"/>
+            <a:ext cx="1905000" cy="209550"/>
           </a:xfrm>
           <a:prstGeom prst="rect">
             <a:avLst/>
@@ -6039,9 +5947,140 @@
               </a:lnSpc>
             </a:pPr>
             <a:r>
-              <a:rPr sz="1200" b="1">
-                <a:solidFill>
-                  <a:srgbClr val="475569"/>
+              <a:rPr sz="1100" b="1">
+                <a:solidFill>
+                  <a:srgbClr val="2563EB"/>
+                </a:solidFill>
+                <a:latin typeface="PingFang SC"/>
+              </a:rPr>
+              <a:t>L1</a:t>
+            </a:r>
+          </a:p>
+        </p:txBody>
+      </p:sp>
+      <p:sp>
+        <p:nvSpPr>
+          <p:cNvPr id="7" name="Rounded Rectangle 6"/>
+          <p:cNvSpPr/>
+          <p:nvPr/>
+        </p:nvSpPr>
+        <p:spPr>
+          <a:xfrm>
+            <a:off x="1905000" y="952500"/>
+            <a:ext cx="8763000" cy="1023937"/>
+          </a:xfrm>
+          <a:prstGeom prst="roundRect">
+            <a:avLst>
+              <a:gd name="adj" fmla="val 8000"/>
+            </a:avLst>
+          </a:prstGeom>
+          <a:solidFill>
+            <a:srgbClr val="FFFFFF"/>
+          </a:solidFill>
+          <a:ln w="12700">
+            <a:solidFill>
+              <a:srgbClr val="2563EB"/>
+            </a:solidFill>
+          </a:ln>
+          <a:effectLst/>
+        </p:spPr>
+        <p:style>
+          <a:lnRef idx="1">
+            <a:schemeClr val="accent1"/>
+          </a:lnRef>
+          <a:fillRef idx="3">
+            <a:schemeClr val="accent1"/>
+          </a:fillRef>
+          <a:effectRef idx="2">
+            <a:schemeClr val="accent1"/>
+          </a:effectRef>
+          <a:fontRef idx="minor">
+            <a:schemeClr val="lt1"/>
+          </a:fontRef>
+        </p:style>
+        <p:txBody>
+          <a:bodyPr rtlCol="0" anchor="ctr"/>
+          <a:lstStyle/>
+          <a:p>
+            <a:pPr algn="ctr"/>
+          </a:p>
+        </p:txBody>
+      </p:sp>
+      <p:sp>
+        <p:nvSpPr>
+          <p:cNvPr id="8" name="Rectangle 7"/>
+          <p:cNvSpPr/>
+          <p:nvPr/>
+        </p:nvSpPr>
+        <p:spPr>
+          <a:xfrm>
+            <a:off x="1905000" y="952500"/>
+            <a:ext cx="47625" cy="1023937"/>
+          </a:xfrm>
+          <a:prstGeom prst="rect">
+            <a:avLst/>
+          </a:prstGeom>
+          <a:solidFill>
+            <a:srgbClr val="2563EB"/>
+          </a:solidFill>
+          <a:ln>
+            <a:noFill/>
+          </a:ln>
+          <a:effectLst/>
+        </p:spPr>
+        <p:style>
+          <a:lnRef idx="1">
+            <a:schemeClr val="accent1"/>
+          </a:lnRef>
+          <a:fillRef idx="3">
+            <a:schemeClr val="accent1"/>
+          </a:fillRef>
+          <a:effectRef idx="2">
+            <a:schemeClr val="accent1"/>
+          </a:effectRef>
+          <a:fontRef idx="minor">
+            <a:schemeClr val="lt1"/>
+          </a:fontRef>
+        </p:style>
+        <p:txBody>
+          <a:bodyPr rtlCol="0" anchor="ctr"/>
+          <a:lstStyle/>
+          <a:p>
+            <a:pPr algn="ctr"/>
+          </a:p>
+        </p:txBody>
+      </p:sp>
+      <p:sp>
+        <p:nvSpPr>
+          <p:cNvPr id="9" name="TextBox 8"/>
+          <p:cNvSpPr txBox="1"/>
+          <p:nvPr/>
+        </p:nvSpPr>
+        <p:spPr>
+          <a:xfrm>
+            <a:off x="2057400" y="952500"/>
+            <a:ext cx="8496300" cy="1023937"/>
+          </a:xfrm>
+          <a:prstGeom prst="rect">
+            <a:avLst/>
+          </a:prstGeom>
+          <a:noFill/>
+        </p:spPr>
+        <p:txBody>
+          <a:bodyPr wrap="none" anchor="ctr">
+            <a:spAutoFit/>
+          </a:bodyPr>
+          <a:lstStyle/>
+          <a:p>
+            <a:pPr algn="l">
+              <a:lnSpc>
+                <a:spcPct val="115000"/>
+              </a:lnSpc>
+            </a:pPr>
+            <a:r>
+              <a:rPr sz="900" b="1">
+                <a:solidFill>
+                  <a:srgbClr val="0B1D3A"/>
                 </a:solidFill>
                 <a:latin typeface="PingFang SC"/>
               </a:rPr>
@@ -6052,7 +6091,7 @@
       </p:sp>
       <p:cxnSp>
         <p:nvCxnSpPr>
-          <p:cNvPr id="9" name="Connector 8"/>
+          <p:cNvPr id="10" name="Connector 9"/>
           <p:cNvCxnSpPr/>
           <p:nvPr/>
         </p:nvCxnSpPr>
@@ -6064,9 +6103,9 @@
           <a:prstGeom prst="line">
             <a:avLst/>
           </a:prstGeom>
-          <a:ln w="15240">
+          <a:ln w="17780">
             <a:solidFill>
-              <a:srgbClr val="94A3B8"/>
+              <a:srgbClr val="475569"/>
             </a:solidFill>
           </a:ln>
         </p:spPr>
@@ -6087,7 +6126,7 @@
       </p:cxnSp>
       <p:sp>
         <p:nvSpPr>
-          <p:cNvPr id="10" name="Isosceles Triangle 9"/>
+          <p:cNvPr id="11" name="Isosceles Triangle 10"/>
           <p:cNvSpPr/>
           <p:nvPr/>
         </p:nvSpPr>
@@ -6100,7 +6139,7 @@
             <a:avLst/>
           </a:prstGeom>
           <a:solidFill>
-            <a:srgbClr val="94A3B8"/>
+            <a:srgbClr val="475569"/>
           </a:solidFill>
           <a:ln>
             <a:noFill/>
@@ -6131,14 +6170,147 @@
       </p:sp>
       <p:sp>
         <p:nvSpPr>
-          <p:cNvPr id="11" name="TextBox 10"/>
+          <p:cNvPr id="12" name="Rounded Rectangle 11"/>
+          <p:cNvSpPr/>
+          <p:nvPr/>
+        </p:nvSpPr>
+        <p:spPr>
+          <a:xfrm>
+            <a:off x="5743575" y="2014537"/>
+            <a:ext cx="704850" cy="171450"/>
+          </a:xfrm>
+          <a:prstGeom prst="roundRect">
+            <a:avLst>
+              <a:gd name="adj" fmla="val 8000"/>
+            </a:avLst>
+          </a:prstGeom>
+          <a:solidFill>
+            <a:srgbClr val="FFFFFF"/>
+          </a:solidFill>
+          <a:ln w="12700">
+            <a:solidFill>
+              <a:srgbClr val="DDE5EE"/>
+            </a:solidFill>
+          </a:ln>
+          <a:effectLst/>
+        </p:spPr>
+        <p:style>
+          <a:lnRef idx="1">
+            <a:schemeClr val="accent1"/>
+          </a:lnRef>
+          <a:fillRef idx="3">
+            <a:schemeClr val="accent1"/>
+          </a:fillRef>
+          <a:effectRef idx="2">
+            <a:schemeClr val="accent1"/>
+          </a:effectRef>
+          <a:fontRef idx="minor">
+            <a:schemeClr val="lt1"/>
+          </a:fontRef>
+        </p:style>
+        <p:txBody>
+          <a:bodyPr rtlCol="0" anchor="ctr"/>
+          <a:lstStyle/>
+          <a:p>
+            <a:pPr algn="ctr"/>
+          </a:p>
+        </p:txBody>
+      </p:sp>
+      <p:sp>
+        <p:nvSpPr>
+          <p:cNvPr id="13" name="TextBox 12"/>
           <p:cNvSpPr txBox="1"/>
           <p:nvPr/>
         </p:nvSpPr>
         <p:spPr>
           <a:xfrm>
-            <a:off x="6248400" y="1976437"/>
-            <a:ext cx="2095500" cy="247650"/>
+            <a:off x="5743575" y="2014537"/>
+            <a:ext cx="704850" cy="171450"/>
+          </a:xfrm>
+          <a:prstGeom prst="rect">
+            <a:avLst/>
+          </a:prstGeom>
+          <a:noFill/>
+        </p:spPr>
+        <p:txBody>
+          <a:bodyPr wrap="square" anchor="ctr">
+            <a:spAutoFit/>
+          </a:bodyPr>
+          <a:lstStyle/>
+          <a:p>
+            <a:pPr algn="ctr">
+              <a:lnSpc>
+                <a:spcPct val="100000"/>
+              </a:lnSpc>
+            </a:pPr>
+            <a:r>
+              <a:rPr sz="1100" b="1">
+                <a:solidFill>
+                  <a:srgbClr val="0B1D3A"/>
+                </a:solidFill>
+                <a:latin typeface="PingFang SC"/>
+              </a:rPr>
+              <a:t>发现</a:t>
+            </a:r>
+          </a:p>
+        </p:txBody>
+      </p:sp>
+      <p:sp>
+        <p:nvSpPr>
+          <p:cNvPr id="14" name="Rounded Rectangle 13"/>
+          <p:cNvSpPr/>
+          <p:nvPr/>
+        </p:nvSpPr>
+        <p:spPr>
+          <a:xfrm>
+            <a:off x="1847850" y="2185987"/>
+            <a:ext cx="8877300" cy="1100137"/>
+          </a:xfrm>
+          <a:prstGeom prst="roundRect">
+            <a:avLst>
+              <a:gd name="adj" fmla="val 8000"/>
+            </a:avLst>
+          </a:prstGeom>
+          <a:solidFill>
+            <a:srgbClr val="F1F5F9"/>
+          </a:solidFill>
+          <a:ln>
+            <a:noFill/>
+          </a:ln>
+          <a:effectLst/>
+        </p:spPr>
+        <p:style>
+          <a:lnRef idx="1">
+            <a:schemeClr val="accent1"/>
+          </a:lnRef>
+          <a:fillRef idx="3">
+            <a:schemeClr val="accent1"/>
+          </a:fillRef>
+          <a:effectRef idx="2">
+            <a:schemeClr val="accent1"/>
+          </a:effectRef>
+          <a:fontRef idx="minor">
+            <a:schemeClr val="lt1"/>
+          </a:fontRef>
+        </p:style>
+        <p:txBody>
+          <a:bodyPr rtlCol="0" anchor="ctr"/>
+          <a:lstStyle/>
+          <a:p>
+            <a:pPr algn="ctr"/>
+          </a:p>
+        </p:txBody>
+      </p:sp>
+      <p:sp>
+        <p:nvSpPr>
+          <p:cNvPr id="15" name="TextBox 14"/>
+          <p:cNvSpPr txBox="1"/>
+          <p:nvPr/>
+        </p:nvSpPr>
+        <p:spPr>
+          <a:xfrm>
+            <a:off x="1962150" y="1957387"/>
+            <a:ext cx="1905000" cy="209550"/>
           </a:xfrm>
           <a:prstGeom prst="rect">
             <a:avLst/>
@@ -6157,27 +6329,27 @@
               </a:lnSpc>
             </a:pPr>
             <a:r>
-              <a:rPr sz="1000" b="0">
-                <a:solidFill>
-                  <a:srgbClr val="94A3B8"/>
+              <a:rPr sz="1100" b="1">
+                <a:solidFill>
+                  <a:srgbClr val="14B8A6"/>
                 </a:solidFill>
                 <a:latin typeface="PingFang SC"/>
               </a:rPr>
-              <a:t>发现</a:t>
-            </a:r>
-          </a:p>
-        </p:txBody>
-      </p:sp>
-      <p:sp>
-        <p:nvSpPr>
-          <p:cNvPr id="12" name="Rounded Rectangle 11"/>
-          <p:cNvSpPr/>
-          <p:nvPr/>
-        </p:nvSpPr>
-        <p:spPr>
-          <a:xfrm>
-            <a:off x="1847850" y="2185987"/>
-            <a:ext cx="8877300" cy="1100137"/>
+              <a:t>L2</a:t>
+            </a:r>
+          </a:p>
+        </p:txBody>
+      </p:sp>
+      <p:sp>
+        <p:nvSpPr>
+          <p:cNvPr id="16" name="Rounded Rectangle 15"/>
+          <p:cNvSpPr/>
+          <p:nvPr/>
+        </p:nvSpPr>
+        <p:spPr>
+          <a:xfrm>
+            <a:off x="1905000" y="2224087"/>
+            <a:ext cx="2819400" cy="1023937"/>
           </a:xfrm>
           <a:prstGeom prst="roundRect">
             <a:avLst>
@@ -6185,7 +6357,53 @@
             </a:avLst>
           </a:prstGeom>
           <a:solidFill>
-            <a:srgbClr val="F1F5F9"/>
+            <a:srgbClr val="FFFFFF"/>
+          </a:solidFill>
+          <a:ln w="12700">
+            <a:solidFill>
+              <a:srgbClr val="14B8A6"/>
+            </a:solidFill>
+          </a:ln>
+          <a:effectLst/>
+        </p:spPr>
+        <p:style>
+          <a:lnRef idx="1">
+            <a:schemeClr val="accent1"/>
+          </a:lnRef>
+          <a:fillRef idx="3">
+            <a:schemeClr val="accent1"/>
+          </a:fillRef>
+          <a:effectRef idx="2">
+            <a:schemeClr val="accent1"/>
+          </a:effectRef>
+          <a:fontRef idx="minor">
+            <a:schemeClr val="lt1"/>
+          </a:fontRef>
+        </p:style>
+        <p:txBody>
+          <a:bodyPr rtlCol="0" anchor="ctr"/>
+          <a:lstStyle/>
+          <a:p>
+            <a:pPr algn="ctr"/>
+          </a:p>
+        </p:txBody>
+      </p:sp>
+      <p:sp>
+        <p:nvSpPr>
+          <p:cNvPr id="17" name="Rectangle 16"/>
+          <p:cNvSpPr/>
+          <p:nvPr/>
+        </p:nvSpPr>
+        <p:spPr>
+          <a:xfrm>
+            <a:off x="1905000" y="2224087"/>
+            <a:ext cx="47625" cy="1023937"/>
+          </a:xfrm>
+          <a:prstGeom prst="rect">
+            <a:avLst/>
+          </a:prstGeom>
+          <a:solidFill>
+            <a:srgbClr val="14B8A6"/>
           </a:solidFill>
           <a:ln>
             <a:noFill/>
@@ -6216,13 +6434,52 @@
       </p:sp>
       <p:sp>
         <p:nvSpPr>
-          <p:cNvPr id="13" name="Rounded Rectangle 12"/>
-          <p:cNvSpPr/>
-          <p:nvPr/>
-        </p:nvSpPr>
-        <p:spPr>
-          <a:xfrm>
-            <a:off x="1905000" y="2224087"/>
+          <p:cNvPr id="18" name="TextBox 17"/>
+          <p:cNvSpPr txBox="1"/>
+          <p:nvPr/>
+        </p:nvSpPr>
+        <p:spPr>
+          <a:xfrm>
+            <a:off x="2057400" y="2224087"/>
+            <a:ext cx="2552700" cy="1023937"/>
+          </a:xfrm>
+          <a:prstGeom prst="rect">
+            <a:avLst/>
+          </a:prstGeom>
+          <a:noFill/>
+        </p:spPr>
+        <p:txBody>
+          <a:bodyPr wrap="none" anchor="ctr">
+            <a:spAutoFit/>
+          </a:bodyPr>
+          <a:lstStyle/>
+          <a:p>
+            <a:pPr algn="l">
+              <a:lnSpc>
+                <a:spcPct val="115000"/>
+              </a:lnSpc>
+            </a:pPr>
+            <a:r>
+              <a:rPr sz="1100" b="1">
+                <a:solidFill>
+                  <a:srgbClr val="0B1D3A"/>
+                </a:solidFill>
+                <a:latin typeface="PingFang SC"/>
+              </a:rPr>
+              <a:t>MCP Client:发现</a:t>
+            </a:r>
+          </a:p>
+        </p:txBody>
+      </p:sp>
+      <p:sp>
+        <p:nvSpPr>
+          <p:cNvPr id="19" name="Rounded Rectangle 18"/>
+          <p:cNvSpPr/>
+          <p:nvPr/>
+        </p:nvSpPr>
+        <p:spPr>
+          <a:xfrm>
+            <a:off x="4876800" y="2224087"/>
             <a:ext cx="2819400" cy="1023937"/>
           </a:xfrm>
           <a:prstGeom prst="roundRect">
@@ -6264,13 +6521,13 @@
       </p:sp>
       <p:sp>
         <p:nvSpPr>
-          <p:cNvPr id="14" name="Rectangle 13"/>
-          <p:cNvSpPr/>
-          <p:nvPr/>
-        </p:nvSpPr>
-        <p:spPr>
-          <a:xfrm>
-            <a:off x="1905000" y="2224087"/>
+          <p:cNvPr id="20" name="Rectangle 19"/>
+          <p:cNvSpPr/>
+          <p:nvPr/>
+        </p:nvSpPr>
+        <p:spPr>
+          <a:xfrm>
+            <a:off x="4876800" y="2224087"/>
             <a:ext cx="47625" cy="1023937"/>
           </a:xfrm>
           <a:prstGeom prst="rect">
@@ -6308,14 +6565,396 @@
       </p:sp>
       <p:sp>
         <p:nvSpPr>
-          <p:cNvPr id="15" name="TextBox 14"/>
+          <p:cNvPr id="21" name="TextBox 20"/>
           <p:cNvSpPr txBox="1"/>
           <p:nvPr/>
         </p:nvSpPr>
         <p:spPr>
           <a:xfrm>
-            <a:off x="2038350" y="2224087"/>
-            <a:ext cx="2590800" cy="1023937"/>
+            <a:off x="5029200" y="2224087"/>
+            <a:ext cx="2552700" cy="1023937"/>
+          </a:xfrm>
+          <a:prstGeom prst="rect">
+            <a:avLst/>
+          </a:prstGeom>
+          <a:noFill/>
+        </p:spPr>
+        <p:txBody>
+          <a:bodyPr wrap="none" anchor="ctr">
+            <a:spAutoFit/>
+          </a:bodyPr>
+          <a:lstStyle/>
+          <a:p>
+            <a:pPr algn="l">
+              <a:lnSpc>
+                <a:spcPct val="115000"/>
+              </a:lnSpc>
+            </a:pPr>
+            <a:r>
+              <a:rPr sz="1300" b="1">
+                <a:solidFill>
+                  <a:srgbClr val="0B1D3A"/>
+                </a:solidFill>
+                <a:latin typeface="PingFang SC"/>
+              </a:rPr>
+              <a:t>调用</a:t>
+            </a:r>
+          </a:p>
+        </p:txBody>
+      </p:sp>
+      <p:sp>
+        <p:nvSpPr>
+          <p:cNvPr id="22" name="Rounded Rectangle 21"/>
+          <p:cNvSpPr/>
+          <p:nvPr/>
+        </p:nvSpPr>
+        <p:spPr>
+          <a:xfrm>
+            <a:off x="7848600" y="2224087"/>
+            <a:ext cx="2819400" cy="1023937"/>
+          </a:xfrm>
+          <a:prstGeom prst="roundRect">
+            <a:avLst>
+              <a:gd name="adj" fmla="val 8000"/>
+            </a:avLst>
+          </a:prstGeom>
+          <a:solidFill>
+            <a:srgbClr val="FFFFFF"/>
+          </a:solidFill>
+          <a:ln w="12700">
+            <a:solidFill>
+              <a:srgbClr val="14B8A6"/>
+            </a:solidFill>
+          </a:ln>
+          <a:effectLst/>
+        </p:spPr>
+        <p:style>
+          <a:lnRef idx="1">
+            <a:schemeClr val="accent1"/>
+          </a:lnRef>
+          <a:fillRef idx="3">
+            <a:schemeClr val="accent1"/>
+          </a:fillRef>
+          <a:effectRef idx="2">
+            <a:schemeClr val="accent1"/>
+          </a:effectRef>
+          <a:fontRef idx="minor">
+            <a:schemeClr val="lt1"/>
+          </a:fontRef>
+        </p:style>
+        <p:txBody>
+          <a:bodyPr rtlCol="0" anchor="ctr"/>
+          <a:lstStyle/>
+          <a:p>
+            <a:pPr algn="ctr"/>
+          </a:p>
+        </p:txBody>
+      </p:sp>
+      <p:sp>
+        <p:nvSpPr>
+          <p:cNvPr id="23" name="Rectangle 22"/>
+          <p:cNvSpPr/>
+          <p:nvPr/>
+        </p:nvSpPr>
+        <p:spPr>
+          <a:xfrm>
+            <a:off x="7848600" y="2224087"/>
+            <a:ext cx="47625" cy="1023937"/>
+          </a:xfrm>
+          <a:prstGeom prst="rect">
+            <a:avLst/>
+          </a:prstGeom>
+          <a:solidFill>
+            <a:srgbClr val="14B8A6"/>
+          </a:solidFill>
+          <a:ln>
+            <a:noFill/>
+          </a:ln>
+          <a:effectLst/>
+        </p:spPr>
+        <p:style>
+          <a:lnRef idx="1">
+            <a:schemeClr val="accent1"/>
+          </a:lnRef>
+          <a:fillRef idx="3">
+            <a:schemeClr val="accent1"/>
+          </a:fillRef>
+          <a:effectRef idx="2">
+            <a:schemeClr val="accent1"/>
+          </a:effectRef>
+          <a:fontRef idx="minor">
+            <a:schemeClr val="lt1"/>
+          </a:fontRef>
+        </p:style>
+        <p:txBody>
+          <a:bodyPr rtlCol="0" anchor="ctr"/>
+          <a:lstStyle/>
+          <a:p>
+            <a:pPr algn="ctr"/>
+          </a:p>
+        </p:txBody>
+      </p:sp>
+      <p:sp>
+        <p:nvSpPr>
+          <p:cNvPr id="24" name="TextBox 23"/>
+          <p:cNvSpPr txBox="1"/>
+          <p:nvPr/>
+        </p:nvSpPr>
+        <p:spPr>
+          <a:xfrm>
+            <a:off x="8001000" y="2224087"/>
+            <a:ext cx="2552700" cy="1023937"/>
+          </a:xfrm>
+          <a:prstGeom prst="rect">
+            <a:avLst/>
+          </a:prstGeom>
+          <a:noFill/>
+        </p:spPr>
+        <p:txBody>
+          <a:bodyPr wrap="none" anchor="ctr">
+            <a:spAutoFit/>
+          </a:bodyPr>
+          <a:lstStyle/>
+          <a:p>
+            <a:pPr algn="l">
+              <a:lnSpc>
+                <a:spcPct val="115000"/>
+              </a:lnSpc>
+            </a:pPr>
+            <a:r>
+              <a:rPr sz="1300" b="1">
+                <a:solidFill>
+                  <a:srgbClr val="0B1D3A"/>
+                </a:solidFill>
+                <a:latin typeface="PingFang SC"/>
+              </a:rPr>
+              <a:t>连接池</a:t>
+            </a:r>
+          </a:p>
+        </p:txBody>
+      </p:sp>
+      <p:cxnSp>
+        <p:nvCxnSpPr>
+          <p:cNvPr id="25" name="Connector 24"/>
+          <p:cNvCxnSpPr/>
+          <p:nvPr/>
+        </p:nvCxnSpPr>
+        <p:spPr>
+          <a:xfrm>
+            <a:off x="6096000" y="3305174"/>
+            <a:ext cx="0" cy="152400"/>
+          </a:xfrm>
+          <a:prstGeom prst="line">
+            <a:avLst/>
+          </a:prstGeom>
+          <a:ln w="17780">
+            <a:solidFill>
+              <a:srgbClr val="475569"/>
+            </a:solidFill>
+          </a:ln>
+        </p:spPr>
+        <p:style>
+          <a:lnRef idx="2">
+            <a:schemeClr val="accent1"/>
+          </a:lnRef>
+          <a:fillRef idx="0">
+            <a:schemeClr val="accent1"/>
+          </a:fillRef>
+          <a:effectRef idx="1">
+            <a:schemeClr val="accent1"/>
+          </a:effectRef>
+          <a:fontRef idx="minor">
+            <a:schemeClr val="tx1"/>
+          </a:fontRef>
+        </p:style>
+      </p:cxnSp>
+      <p:sp>
+        <p:nvSpPr>
+          <p:cNvPr id="26" name="Isosceles Triangle 25"/>
+          <p:cNvSpPr/>
+          <p:nvPr/>
+        </p:nvSpPr>
+        <p:spPr>
+          <a:xfrm rot="10800000">
+            <a:off x="6053138" y="3371850"/>
+            <a:ext cx="85725" cy="85725"/>
+          </a:xfrm>
+          <a:prstGeom prst="triangle">
+            <a:avLst/>
+          </a:prstGeom>
+          <a:solidFill>
+            <a:srgbClr val="475569"/>
+          </a:solidFill>
+          <a:ln>
+            <a:noFill/>
+          </a:ln>
+          <a:effectLst/>
+        </p:spPr>
+        <p:style>
+          <a:lnRef idx="1">
+            <a:schemeClr val="accent1"/>
+          </a:lnRef>
+          <a:fillRef idx="3">
+            <a:schemeClr val="accent1"/>
+          </a:fillRef>
+          <a:effectRef idx="2">
+            <a:schemeClr val="accent1"/>
+          </a:effectRef>
+          <a:fontRef idx="minor">
+            <a:schemeClr val="lt1"/>
+          </a:fontRef>
+        </p:style>
+        <p:txBody>
+          <a:bodyPr rtlCol="0" anchor="ctr"/>
+          <a:lstStyle/>
+          <a:p>
+            <a:pPr algn="ctr"/>
+          </a:p>
+        </p:txBody>
+      </p:sp>
+      <p:sp>
+        <p:nvSpPr>
+          <p:cNvPr id="27" name="Rounded Rectangle 26"/>
+          <p:cNvSpPr/>
+          <p:nvPr/>
+        </p:nvSpPr>
+        <p:spPr>
+          <a:xfrm>
+            <a:off x="5743575" y="3286124"/>
+            <a:ext cx="704850" cy="171450"/>
+          </a:xfrm>
+          <a:prstGeom prst="roundRect">
+            <a:avLst>
+              <a:gd name="adj" fmla="val 8000"/>
+            </a:avLst>
+          </a:prstGeom>
+          <a:solidFill>
+            <a:srgbClr val="FFFFFF"/>
+          </a:solidFill>
+          <a:ln w="12700">
+            <a:solidFill>
+              <a:srgbClr val="DDE5EE"/>
+            </a:solidFill>
+          </a:ln>
+          <a:effectLst/>
+        </p:spPr>
+        <p:style>
+          <a:lnRef idx="1">
+            <a:schemeClr val="accent1"/>
+          </a:lnRef>
+          <a:fillRef idx="3">
+            <a:schemeClr val="accent1"/>
+          </a:fillRef>
+          <a:effectRef idx="2">
+            <a:schemeClr val="accent1"/>
+          </a:effectRef>
+          <a:fontRef idx="minor">
+            <a:schemeClr val="lt1"/>
+          </a:fontRef>
+        </p:style>
+        <p:txBody>
+          <a:bodyPr rtlCol="0" anchor="ctr"/>
+          <a:lstStyle/>
+          <a:p>
+            <a:pPr algn="ctr"/>
+          </a:p>
+        </p:txBody>
+      </p:sp>
+      <p:sp>
+        <p:nvSpPr>
+          <p:cNvPr id="28" name="TextBox 27"/>
+          <p:cNvSpPr txBox="1"/>
+          <p:nvPr/>
+        </p:nvSpPr>
+        <p:spPr>
+          <a:xfrm>
+            <a:off x="5743575" y="3286124"/>
+            <a:ext cx="704850" cy="171450"/>
+          </a:xfrm>
+          <a:prstGeom prst="rect">
+            <a:avLst/>
+          </a:prstGeom>
+          <a:noFill/>
+        </p:spPr>
+        <p:txBody>
+          <a:bodyPr wrap="square" anchor="ctr">
+            <a:spAutoFit/>
+          </a:bodyPr>
+          <a:lstStyle/>
+          <a:p>
+            <a:pPr algn="ctr">
+              <a:lnSpc>
+                <a:spcPct val="100000"/>
+              </a:lnSpc>
+            </a:pPr>
+            <a:r>
+              <a:rPr sz="1100" b="1">
+                <a:solidFill>
+                  <a:srgbClr val="0B1D3A"/>
+                </a:solidFill>
+                <a:latin typeface="PingFang SC"/>
+              </a:rPr>
+              <a:t>调用</a:t>
+            </a:r>
+          </a:p>
+        </p:txBody>
+      </p:sp>
+      <p:sp>
+        <p:nvSpPr>
+          <p:cNvPr id="29" name="Rounded Rectangle 28"/>
+          <p:cNvSpPr/>
+          <p:nvPr/>
+        </p:nvSpPr>
+        <p:spPr>
+          <a:xfrm>
+            <a:off x="1847850" y="3457574"/>
+            <a:ext cx="8877300" cy="1100137"/>
+          </a:xfrm>
+          <a:prstGeom prst="roundRect">
+            <a:avLst>
+              <a:gd name="adj" fmla="val 8000"/>
+            </a:avLst>
+          </a:prstGeom>
+          <a:solidFill>
+            <a:srgbClr val="F1F5F9"/>
+          </a:solidFill>
+          <a:ln>
+            <a:noFill/>
+          </a:ln>
+          <a:effectLst/>
+        </p:spPr>
+        <p:style>
+          <a:lnRef idx="1">
+            <a:schemeClr val="accent1"/>
+          </a:lnRef>
+          <a:fillRef idx="3">
+            <a:schemeClr val="accent1"/>
+          </a:fillRef>
+          <a:effectRef idx="2">
+            <a:schemeClr val="accent1"/>
+          </a:effectRef>
+          <a:fontRef idx="minor">
+            <a:schemeClr val="lt1"/>
+          </a:fontRef>
+        </p:style>
+        <p:txBody>
+          <a:bodyPr rtlCol="0" anchor="ctr"/>
+          <a:lstStyle/>
+          <a:p>
+            <a:pPr algn="ctr"/>
+          </a:p>
+        </p:txBody>
+      </p:sp>
+      <p:sp>
+        <p:nvSpPr>
+          <p:cNvPr id="30" name="TextBox 29"/>
+          <p:cNvSpPr txBox="1"/>
+          <p:nvPr/>
+        </p:nvSpPr>
+        <p:spPr>
+          <a:xfrm>
+            <a:off x="1962150" y="3228974"/>
+            <a:ext cx="1905000" cy="209550"/>
           </a:xfrm>
           <a:prstGeom prst="rect">
             <a:avLst/>
@@ -6334,27 +6973,27 @@
               </a:lnSpc>
             </a:pPr>
             <a:r>
-              <a:rPr sz="1200" b="1">
-                <a:solidFill>
-                  <a:srgbClr val="475569"/>
+              <a:rPr sz="1100" b="1">
+                <a:solidFill>
+                  <a:srgbClr val="8B5CF6"/>
                 </a:solidFill>
                 <a:latin typeface="PingFang SC"/>
               </a:rPr>
-              <a:t>MCP Client:发现</a:t>
-            </a:r>
-          </a:p>
-        </p:txBody>
-      </p:sp>
-      <p:sp>
-        <p:nvSpPr>
-          <p:cNvPr id="16" name="Rounded Rectangle 15"/>
-          <p:cNvSpPr/>
-          <p:nvPr/>
-        </p:nvSpPr>
-        <p:spPr>
-          <a:xfrm>
-            <a:off x="4876800" y="2224087"/>
-            <a:ext cx="2819400" cy="1023937"/>
+              <a:t>L3</a:t>
+            </a:r>
+          </a:p>
+        </p:txBody>
+      </p:sp>
+      <p:sp>
+        <p:nvSpPr>
+          <p:cNvPr id="31" name="Rounded Rectangle 30"/>
+          <p:cNvSpPr/>
+          <p:nvPr/>
+        </p:nvSpPr>
+        <p:spPr>
+          <a:xfrm>
+            <a:off x="1905000" y="3495674"/>
+            <a:ext cx="2076450" cy="1023937"/>
           </a:xfrm>
           <a:prstGeom prst="roundRect">
             <a:avLst>
@@ -6366,7 +7005,7 @@
           </a:solidFill>
           <a:ln w="12700">
             <a:solidFill>
-              <a:srgbClr val="14B8A6"/>
+              <a:srgbClr val="8B5CF6"/>
             </a:solidFill>
           </a:ln>
           <a:effectLst/>
@@ -6395,20 +7034,20 @@
       </p:sp>
       <p:sp>
         <p:nvSpPr>
-          <p:cNvPr id="17" name="Rectangle 16"/>
-          <p:cNvSpPr/>
-          <p:nvPr/>
-        </p:nvSpPr>
-        <p:spPr>
-          <a:xfrm>
-            <a:off x="4876800" y="2224087"/>
+          <p:cNvPr id="32" name="Rectangle 31"/>
+          <p:cNvSpPr/>
+          <p:nvPr/>
+        </p:nvSpPr>
+        <p:spPr>
+          <a:xfrm>
+            <a:off x="1905000" y="3495674"/>
             <a:ext cx="47625" cy="1023937"/>
           </a:xfrm>
           <a:prstGeom prst="rect">
             <a:avLst/>
           </a:prstGeom>
           <a:solidFill>
-            <a:srgbClr val="14B8A6"/>
+            <a:srgbClr val="8B5CF6"/>
           </a:solidFill>
           <a:ln>
             <a:noFill/>
@@ -6439,14 +7078,658 @@
       </p:sp>
       <p:sp>
         <p:nvSpPr>
-          <p:cNvPr id="18" name="TextBox 17"/>
+          <p:cNvPr id="33" name="TextBox 32"/>
           <p:cNvSpPr txBox="1"/>
           <p:nvPr/>
         </p:nvSpPr>
         <p:spPr>
           <a:xfrm>
-            <a:off x="5010150" y="2224087"/>
-            <a:ext cx="2590800" cy="1023937"/>
+            <a:off x="2057400" y="3495674"/>
+            <a:ext cx="1809750" cy="1023937"/>
+          </a:xfrm>
+          <a:prstGeom prst="rect">
+            <a:avLst/>
+          </a:prstGeom>
+          <a:noFill/>
+        </p:spPr>
+        <p:txBody>
+          <a:bodyPr wrap="none" anchor="ctr">
+            <a:spAutoFit/>
+          </a:bodyPr>
+          <a:lstStyle/>
+          <a:p>
+            <a:pPr algn="l">
+              <a:lnSpc>
+                <a:spcPct val="115000"/>
+              </a:lnSpc>
+            </a:pPr>
+            <a:r>
+              <a:rPr sz="1100" b="1">
+                <a:solidFill>
+                  <a:srgbClr val="0B1D3A"/>
+                </a:solidFill>
+                <a:latin typeface="PingFang SC"/>
+              </a:rPr>
+              <a:t>MCP Server 群:文件系统</a:t>
+            </a:r>
+          </a:p>
+        </p:txBody>
+      </p:sp>
+      <p:sp>
+        <p:nvSpPr>
+          <p:cNvPr id="34" name="Rounded Rectangle 33"/>
+          <p:cNvSpPr/>
+          <p:nvPr/>
+        </p:nvSpPr>
+        <p:spPr>
+          <a:xfrm>
+            <a:off x="4133850" y="3495674"/>
+            <a:ext cx="2076450" cy="1023937"/>
+          </a:xfrm>
+          <a:prstGeom prst="roundRect">
+            <a:avLst>
+              <a:gd name="adj" fmla="val 8000"/>
+            </a:avLst>
+          </a:prstGeom>
+          <a:solidFill>
+            <a:srgbClr val="FFFFFF"/>
+          </a:solidFill>
+          <a:ln w="12700">
+            <a:solidFill>
+              <a:srgbClr val="8B5CF6"/>
+            </a:solidFill>
+          </a:ln>
+          <a:effectLst/>
+        </p:spPr>
+        <p:style>
+          <a:lnRef idx="1">
+            <a:schemeClr val="accent1"/>
+          </a:lnRef>
+          <a:fillRef idx="3">
+            <a:schemeClr val="accent1"/>
+          </a:fillRef>
+          <a:effectRef idx="2">
+            <a:schemeClr val="accent1"/>
+          </a:effectRef>
+          <a:fontRef idx="minor">
+            <a:schemeClr val="lt1"/>
+          </a:fontRef>
+        </p:style>
+        <p:txBody>
+          <a:bodyPr rtlCol="0" anchor="ctr"/>
+          <a:lstStyle/>
+          <a:p>
+            <a:pPr algn="ctr"/>
+          </a:p>
+        </p:txBody>
+      </p:sp>
+      <p:sp>
+        <p:nvSpPr>
+          <p:cNvPr id="35" name="Rectangle 34"/>
+          <p:cNvSpPr/>
+          <p:nvPr/>
+        </p:nvSpPr>
+        <p:spPr>
+          <a:xfrm>
+            <a:off x="4133850" y="3495674"/>
+            <a:ext cx="47625" cy="1023937"/>
+          </a:xfrm>
+          <a:prstGeom prst="rect">
+            <a:avLst/>
+          </a:prstGeom>
+          <a:solidFill>
+            <a:srgbClr val="8B5CF6"/>
+          </a:solidFill>
+          <a:ln>
+            <a:noFill/>
+          </a:ln>
+          <a:effectLst/>
+        </p:spPr>
+        <p:style>
+          <a:lnRef idx="1">
+            <a:schemeClr val="accent1"/>
+          </a:lnRef>
+          <a:fillRef idx="3">
+            <a:schemeClr val="accent1"/>
+          </a:fillRef>
+          <a:effectRef idx="2">
+            <a:schemeClr val="accent1"/>
+          </a:effectRef>
+          <a:fontRef idx="minor">
+            <a:schemeClr val="lt1"/>
+          </a:fontRef>
+        </p:style>
+        <p:txBody>
+          <a:bodyPr rtlCol="0" anchor="ctr"/>
+          <a:lstStyle/>
+          <a:p>
+            <a:pPr algn="ctr"/>
+          </a:p>
+        </p:txBody>
+      </p:sp>
+      <p:sp>
+        <p:nvSpPr>
+          <p:cNvPr id="36" name="TextBox 35"/>
+          <p:cNvSpPr txBox="1"/>
+          <p:nvPr/>
+        </p:nvSpPr>
+        <p:spPr>
+          <a:xfrm>
+            <a:off x="4286250" y="3495674"/>
+            <a:ext cx="1809750" cy="1023937"/>
+          </a:xfrm>
+          <a:prstGeom prst="rect">
+            <a:avLst/>
+          </a:prstGeom>
+          <a:noFill/>
+        </p:spPr>
+        <p:txBody>
+          <a:bodyPr wrap="none" anchor="ctr">
+            <a:spAutoFit/>
+          </a:bodyPr>
+          <a:lstStyle/>
+          <a:p>
+            <a:pPr algn="l">
+              <a:lnSpc>
+                <a:spcPct val="115000"/>
+              </a:lnSpc>
+            </a:pPr>
+            <a:r>
+              <a:rPr sz="1300" b="1">
+                <a:solidFill>
+                  <a:srgbClr val="0B1D3A"/>
+                </a:solidFill>
+                <a:latin typeface="PingFang SC"/>
+              </a:rPr>
+              <a:t>数据库</a:t>
+            </a:r>
+          </a:p>
+        </p:txBody>
+      </p:sp>
+      <p:sp>
+        <p:nvSpPr>
+          <p:cNvPr id="37" name="Rounded Rectangle 36"/>
+          <p:cNvSpPr/>
+          <p:nvPr/>
+        </p:nvSpPr>
+        <p:spPr>
+          <a:xfrm>
+            <a:off x="6362700" y="3495674"/>
+            <a:ext cx="2076450" cy="1023937"/>
+          </a:xfrm>
+          <a:prstGeom prst="roundRect">
+            <a:avLst>
+              <a:gd name="adj" fmla="val 8000"/>
+            </a:avLst>
+          </a:prstGeom>
+          <a:solidFill>
+            <a:srgbClr val="FFFFFF"/>
+          </a:solidFill>
+          <a:ln w="12700">
+            <a:solidFill>
+              <a:srgbClr val="8B5CF6"/>
+            </a:solidFill>
+          </a:ln>
+          <a:effectLst/>
+        </p:spPr>
+        <p:style>
+          <a:lnRef idx="1">
+            <a:schemeClr val="accent1"/>
+          </a:lnRef>
+          <a:fillRef idx="3">
+            <a:schemeClr val="accent1"/>
+          </a:fillRef>
+          <a:effectRef idx="2">
+            <a:schemeClr val="accent1"/>
+          </a:effectRef>
+          <a:fontRef idx="minor">
+            <a:schemeClr val="lt1"/>
+          </a:fontRef>
+        </p:style>
+        <p:txBody>
+          <a:bodyPr rtlCol="0" anchor="ctr"/>
+          <a:lstStyle/>
+          <a:p>
+            <a:pPr algn="ctr"/>
+          </a:p>
+        </p:txBody>
+      </p:sp>
+      <p:sp>
+        <p:nvSpPr>
+          <p:cNvPr id="38" name="Rectangle 37"/>
+          <p:cNvSpPr/>
+          <p:nvPr/>
+        </p:nvSpPr>
+        <p:spPr>
+          <a:xfrm>
+            <a:off x="6362700" y="3495674"/>
+            <a:ext cx="47625" cy="1023937"/>
+          </a:xfrm>
+          <a:prstGeom prst="rect">
+            <a:avLst/>
+          </a:prstGeom>
+          <a:solidFill>
+            <a:srgbClr val="8B5CF6"/>
+          </a:solidFill>
+          <a:ln>
+            <a:noFill/>
+          </a:ln>
+          <a:effectLst/>
+        </p:spPr>
+        <p:style>
+          <a:lnRef idx="1">
+            <a:schemeClr val="accent1"/>
+          </a:lnRef>
+          <a:fillRef idx="3">
+            <a:schemeClr val="accent1"/>
+          </a:fillRef>
+          <a:effectRef idx="2">
+            <a:schemeClr val="accent1"/>
+          </a:effectRef>
+          <a:fontRef idx="minor">
+            <a:schemeClr val="lt1"/>
+          </a:fontRef>
+        </p:style>
+        <p:txBody>
+          <a:bodyPr rtlCol="0" anchor="ctr"/>
+          <a:lstStyle/>
+          <a:p>
+            <a:pPr algn="ctr"/>
+          </a:p>
+        </p:txBody>
+      </p:sp>
+      <p:sp>
+        <p:nvSpPr>
+          <p:cNvPr id="39" name="TextBox 38"/>
+          <p:cNvSpPr txBox="1"/>
+          <p:nvPr/>
+        </p:nvSpPr>
+        <p:spPr>
+          <a:xfrm>
+            <a:off x="6515100" y="3495674"/>
+            <a:ext cx="1809750" cy="1023937"/>
+          </a:xfrm>
+          <a:prstGeom prst="rect">
+            <a:avLst/>
+          </a:prstGeom>
+          <a:noFill/>
+        </p:spPr>
+        <p:txBody>
+          <a:bodyPr wrap="none" anchor="ctr">
+            <a:spAutoFit/>
+          </a:bodyPr>
+          <a:lstStyle/>
+          <a:p>
+            <a:pPr algn="l">
+              <a:lnSpc>
+                <a:spcPct val="115000"/>
+              </a:lnSpc>
+            </a:pPr>
+            <a:r>
+              <a:rPr sz="1300" b="1">
+                <a:solidFill>
+                  <a:srgbClr val="0B1D3A"/>
+                </a:solidFill>
+                <a:latin typeface="PingFang SC"/>
+              </a:rPr>
+              <a:t>GitHub</a:t>
+            </a:r>
+          </a:p>
+        </p:txBody>
+      </p:sp>
+      <p:sp>
+        <p:nvSpPr>
+          <p:cNvPr id="40" name="Rounded Rectangle 39"/>
+          <p:cNvSpPr/>
+          <p:nvPr/>
+        </p:nvSpPr>
+        <p:spPr>
+          <a:xfrm>
+            <a:off x="8591550" y="3495674"/>
+            <a:ext cx="2076450" cy="1023937"/>
+          </a:xfrm>
+          <a:prstGeom prst="roundRect">
+            <a:avLst>
+              <a:gd name="adj" fmla="val 8000"/>
+            </a:avLst>
+          </a:prstGeom>
+          <a:solidFill>
+            <a:srgbClr val="FFFFFF"/>
+          </a:solidFill>
+          <a:ln w="12700">
+            <a:solidFill>
+              <a:srgbClr val="8B5CF6"/>
+            </a:solidFill>
+          </a:ln>
+          <a:effectLst/>
+        </p:spPr>
+        <p:style>
+          <a:lnRef idx="1">
+            <a:schemeClr val="accent1"/>
+          </a:lnRef>
+          <a:fillRef idx="3">
+            <a:schemeClr val="accent1"/>
+          </a:fillRef>
+          <a:effectRef idx="2">
+            <a:schemeClr val="accent1"/>
+          </a:effectRef>
+          <a:fontRef idx="minor">
+            <a:schemeClr val="lt1"/>
+          </a:fontRef>
+        </p:style>
+        <p:txBody>
+          <a:bodyPr rtlCol="0" anchor="ctr"/>
+          <a:lstStyle/>
+          <a:p>
+            <a:pPr algn="ctr"/>
+          </a:p>
+        </p:txBody>
+      </p:sp>
+      <p:sp>
+        <p:nvSpPr>
+          <p:cNvPr id="41" name="Rectangle 40"/>
+          <p:cNvSpPr/>
+          <p:nvPr/>
+        </p:nvSpPr>
+        <p:spPr>
+          <a:xfrm>
+            <a:off x="8591550" y="3495674"/>
+            <a:ext cx="47625" cy="1023937"/>
+          </a:xfrm>
+          <a:prstGeom prst="rect">
+            <a:avLst/>
+          </a:prstGeom>
+          <a:solidFill>
+            <a:srgbClr val="8B5CF6"/>
+          </a:solidFill>
+          <a:ln>
+            <a:noFill/>
+          </a:ln>
+          <a:effectLst/>
+        </p:spPr>
+        <p:style>
+          <a:lnRef idx="1">
+            <a:schemeClr val="accent1"/>
+          </a:lnRef>
+          <a:fillRef idx="3">
+            <a:schemeClr val="accent1"/>
+          </a:fillRef>
+          <a:effectRef idx="2">
+            <a:schemeClr val="accent1"/>
+          </a:effectRef>
+          <a:fontRef idx="minor">
+            <a:schemeClr val="lt1"/>
+          </a:fontRef>
+        </p:style>
+        <p:txBody>
+          <a:bodyPr rtlCol="0" anchor="ctr"/>
+          <a:lstStyle/>
+          <a:p>
+            <a:pPr algn="ctr"/>
+          </a:p>
+        </p:txBody>
+      </p:sp>
+      <p:sp>
+        <p:nvSpPr>
+          <p:cNvPr id="42" name="TextBox 41"/>
+          <p:cNvSpPr txBox="1"/>
+          <p:nvPr/>
+        </p:nvSpPr>
+        <p:spPr>
+          <a:xfrm>
+            <a:off x="8743950" y="3495674"/>
+            <a:ext cx="1809750" cy="1023937"/>
+          </a:xfrm>
+          <a:prstGeom prst="rect">
+            <a:avLst/>
+          </a:prstGeom>
+          <a:noFill/>
+        </p:spPr>
+        <p:txBody>
+          <a:bodyPr wrap="none" anchor="ctr">
+            <a:spAutoFit/>
+          </a:bodyPr>
+          <a:lstStyle/>
+          <a:p>
+            <a:pPr algn="l">
+              <a:lnSpc>
+                <a:spcPct val="115000"/>
+              </a:lnSpc>
+            </a:pPr>
+            <a:r>
+              <a:rPr sz="1300" b="1">
+                <a:solidFill>
+                  <a:srgbClr val="0B1D3A"/>
+                </a:solidFill>
+                <a:latin typeface="PingFang SC"/>
+              </a:rPr>
+              <a:t>内部 API</a:t>
+            </a:r>
+          </a:p>
+        </p:txBody>
+      </p:sp>
+      <p:cxnSp>
+        <p:nvCxnSpPr>
+          <p:cNvPr id="43" name="Connector 42"/>
+          <p:cNvCxnSpPr/>
+          <p:nvPr/>
+        </p:nvCxnSpPr>
+        <p:spPr>
+          <a:xfrm>
+            <a:off x="6096000" y="4576761"/>
+            <a:ext cx="0" cy="152400"/>
+          </a:xfrm>
+          <a:prstGeom prst="line">
+            <a:avLst/>
+          </a:prstGeom>
+          <a:ln w="17780">
+            <a:solidFill>
+              <a:srgbClr val="475569"/>
+            </a:solidFill>
+          </a:ln>
+        </p:spPr>
+        <p:style>
+          <a:lnRef idx="2">
+            <a:schemeClr val="accent1"/>
+          </a:lnRef>
+          <a:fillRef idx="0">
+            <a:schemeClr val="accent1"/>
+          </a:fillRef>
+          <a:effectRef idx="1">
+            <a:schemeClr val="accent1"/>
+          </a:effectRef>
+          <a:fontRef idx="minor">
+            <a:schemeClr val="tx1"/>
+          </a:fontRef>
+        </p:style>
+      </p:cxnSp>
+      <p:sp>
+        <p:nvSpPr>
+          <p:cNvPr id="44" name="Isosceles Triangle 43"/>
+          <p:cNvSpPr/>
+          <p:nvPr/>
+        </p:nvSpPr>
+        <p:spPr>
+          <a:xfrm rot="10800000">
+            <a:off x="6053138" y="4643437"/>
+            <a:ext cx="85725" cy="85725"/>
+          </a:xfrm>
+          <a:prstGeom prst="triangle">
+            <a:avLst/>
+          </a:prstGeom>
+          <a:solidFill>
+            <a:srgbClr val="475569"/>
+          </a:solidFill>
+          <a:ln>
+            <a:noFill/>
+          </a:ln>
+          <a:effectLst/>
+        </p:spPr>
+        <p:style>
+          <a:lnRef idx="1">
+            <a:schemeClr val="accent1"/>
+          </a:lnRef>
+          <a:fillRef idx="3">
+            <a:schemeClr val="accent1"/>
+          </a:fillRef>
+          <a:effectRef idx="2">
+            <a:schemeClr val="accent1"/>
+          </a:effectRef>
+          <a:fontRef idx="minor">
+            <a:schemeClr val="lt1"/>
+          </a:fontRef>
+        </p:style>
+        <p:txBody>
+          <a:bodyPr rtlCol="0" anchor="ctr"/>
+          <a:lstStyle/>
+          <a:p>
+            <a:pPr algn="ctr"/>
+          </a:p>
+        </p:txBody>
+      </p:sp>
+      <p:sp>
+        <p:nvSpPr>
+          <p:cNvPr id="45" name="Rounded Rectangle 44"/>
+          <p:cNvSpPr/>
+          <p:nvPr/>
+        </p:nvSpPr>
+        <p:spPr>
+          <a:xfrm>
+            <a:off x="5743575" y="4557711"/>
+            <a:ext cx="704850" cy="171450"/>
+          </a:xfrm>
+          <a:prstGeom prst="roundRect">
+            <a:avLst>
+              <a:gd name="adj" fmla="val 8000"/>
+            </a:avLst>
+          </a:prstGeom>
+          <a:solidFill>
+            <a:srgbClr val="FFFFFF"/>
+          </a:solidFill>
+          <a:ln w="12700">
+            <a:solidFill>
+              <a:srgbClr val="DDE5EE"/>
+            </a:solidFill>
+          </a:ln>
+          <a:effectLst/>
+        </p:spPr>
+        <p:style>
+          <a:lnRef idx="1">
+            <a:schemeClr val="accent1"/>
+          </a:lnRef>
+          <a:fillRef idx="3">
+            <a:schemeClr val="accent1"/>
+          </a:fillRef>
+          <a:effectRef idx="2">
+            <a:schemeClr val="accent1"/>
+          </a:effectRef>
+          <a:fontRef idx="minor">
+            <a:schemeClr val="lt1"/>
+          </a:fontRef>
+        </p:style>
+        <p:txBody>
+          <a:bodyPr rtlCol="0" anchor="ctr"/>
+          <a:lstStyle/>
+          <a:p>
+            <a:pPr algn="ctr"/>
+          </a:p>
+        </p:txBody>
+      </p:sp>
+      <p:sp>
+        <p:nvSpPr>
+          <p:cNvPr id="46" name="TextBox 45"/>
+          <p:cNvSpPr txBox="1"/>
+          <p:nvPr/>
+        </p:nvSpPr>
+        <p:spPr>
+          <a:xfrm>
+            <a:off x="5743575" y="4557711"/>
+            <a:ext cx="704850" cy="171450"/>
+          </a:xfrm>
+          <a:prstGeom prst="rect">
+            <a:avLst/>
+          </a:prstGeom>
+          <a:noFill/>
+        </p:spPr>
+        <p:txBody>
+          <a:bodyPr wrap="square" anchor="ctr">
+            <a:spAutoFit/>
+          </a:bodyPr>
+          <a:lstStyle/>
+          <a:p>
+            <a:pPr algn="ctr">
+              <a:lnSpc>
+                <a:spcPct val="100000"/>
+              </a:lnSpc>
+            </a:pPr>
+            <a:r>
+              <a:rPr sz="1100" b="1">
+                <a:solidFill>
+                  <a:srgbClr val="0B1D3A"/>
+                </a:solidFill>
+                <a:latin typeface="PingFang SC"/>
+              </a:rPr>
+              <a:t>治理</a:t>
+            </a:r>
+          </a:p>
+        </p:txBody>
+      </p:sp>
+      <p:sp>
+        <p:nvSpPr>
+          <p:cNvPr id="47" name="Rounded Rectangle 46"/>
+          <p:cNvSpPr/>
+          <p:nvPr/>
+        </p:nvSpPr>
+        <p:spPr>
+          <a:xfrm>
+            <a:off x="1847850" y="4729161"/>
+            <a:ext cx="8877300" cy="1100137"/>
+          </a:xfrm>
+          <a:prstGeom prst="roundRect">
+            <a:avLst>
+              <a:gd name="adj" fmla="val 8000"/>
+            </a:avLst>
+          </a:prstGeom>
+          <a:solidFill>
+            <a:srgbClr val="F1F5F9"/>
+          </a:solidFill>
+          <a:ln>
+            <a:noFill/>
+          </a:ln>
+          <a:effectLst/>
+        </p:spPr>
+        <p:style>
+          <a:lnRef idx="1">
+            <a:schemeClr val="accent1"/>
+          </a:lnRef>
+          <a:fillRef idx="3">
+            <a:schemeClr val="accent1"/>
+          </a:fillRef>
+          <a:effectRef idx="2">
+            <a:schemeClr val="accent1"/>
+          </a:effectRef>
+          <a:fontRef idx="minor">
+            <a:schemeClr val="lt1"/>
+          </a:fontRef>
+        </p:style>
+        <p:txBody>
+          <a:bodyPr rtlCol="0" anchor="ctr"/>
+          <a:lstStyle/>
+          <a:p>
+            <a:pPr algn="ctr"/>
+          </a:p>
+        </p:txBody>
+      </p:sp>
+      <p:sp>
+        <p:nvSpPr>
+          <p:cNvPr id="48" name="TextBox 47"/>
+          <p:cNvSpPr txBox="1"/>
+          <p:nvPr/>
+        </p:nvSpPr>
+        <p:spPr>
+          <a:xfrm>
+            <a:off x="1962150" y="4500561"/>
+            <a:ext cx="1905000" cy="209550"/>
           </a:xfrm>
           <a:prstGeom prst="rect">
             <a:avLst/>
@@ -6465,26 +7748,26 @@
               </a:lnSpc>
             </a:pPr>
             <a:r>
-              <a:rPr sz="1200" b="1">
-                <a:solidFill>
-                  <a:srgbClr val="475569"/>
+              <a:rPr sz="1100" b="1">
+                <a:solidFill>
+                  <a:srgbClr val="F59E0B"/>
                 </a:solidFill>
                 <a:latin typeface="PingFang SC"/>
               </a:rPr>
-              <a:t>调用</a:t>
-            </a:r>
-          </a:p>
-        </p:txBody>
-      </p:sp>
-      <p:sp>
-        <p:nvSpPr>
-          <p:cNvPr id="19" name="Rounded Rectangle 18"/>
-          <p:cNvSpPr/>
-          <p:nvPr/>
-        </p:nvSpPr>
-        <p:spPr>
-          <a:xfrm>
-            <a:off x="7848600" y="2224087"/>
+              <a:t>L4</a:t>
+            </a:r>
+          </a:p>
+        </p:txBody>
+      </p:sp>
+      <p:sp>
+        <p:nvSpPr>
+          <p:cNvPr id="49" name="Rounded Rectangle 48"/>
+          <p:cNvSpPr/>
+          <p:nvPr/>
+        </p:nvSpPr>
+        <p:spPr>
+          <a:xfrm>
+            <a:off x="1905000" y="4767261"/>
             <a:ext cx="2819400" cy="1023937"/>
           </a:xfrm>
           <a:prstGeom prst="roundRect">
@@ -6497,7 +7780,7 @@
           </a:solidFill>
           <a:ln w="12700">
             <a:solidFill>
-              <a:srgbClr val="14B8A6"/>
+              <a:srgbClr val="F59E0B"/>
             </a:solidFill>
           </a:ln>
           <a:effectLst/>
@@ -6526,20 +7809,20 @@
       </p:sp>
       <p:sp>
         <p:nvSpPr>
-          <p:cNvPr id="20" name="Rectangle 19"/>
-          <p:cNvSpPr/>
-          <p:nvPr/>
-        </p:nvSpPr>
-        <p:spPr>
-          <a:xfrm>
-            <a:off x="7848600" y="2224087"/>
+          <p:cNvPr id="50" name="Rectangle 49"/>
+          <p:cNvSpPr/>
+          <p:nvPr/>
+        </p:nvSpPr>
+        <p:spPr>
+          <a:xfrm>
+            <a:off x="1905000" y="4767261"/>
             <a:ext cx="47625" cy="1023937"/>
           </a:xfrm>
           <a:prstGeom prst="rect">
             <a:avLst/>
           </a:prstGeom>
           <a:solidFill>
-            <a:srgbClr val="14B8A6"/>
+            <a:srgbClr val="F59E0B"/>
           </a:solidFill>
           <a:ln>
             <a:noFill/>
@@ -6570,14 +7853,14 @@
       </p:sp>
       <p:sp>
         <p:nvSpPr>
-          <p:cNvPr id="21" name="TextBox 20"/>
+          <p:cNvPr id="51" name="TextBox 50"/>
           <p:cNvSpPr txBox="1"/>
           <p:nvPr/>
         </p:nvSpPr>
         <p:spPr>
           <a:xfrm>
-            <a:off x="7981950" y="2224087"/>
-            <a:ext cx="2590800" cy="1023937"/>
+            <a:off x="2057400" y="4767261"/>
+            <a:ext cx="2552700" cy="1023937"/>
           </a:xfrm>
           <a:prstGeom prst="rect">
             <a:avLst/>
@@ -6585,156 +7868,38 @@
           <a:noFill/>
         </p:spPr>
         <p:txBody>
-          <a:bodyPr wrap="square" anchor="ctr">
+          <a:bodyPr wrap="none" anchor="ctr">
             <a:spAutoFit/>
           </a:bodyPr>
           <a:lstStyle/>
           <a:p>
             <a:pPr algn="l">
               <a:lnSpc>
-                <a:spcPct val="100000"/>
+                <a:spcPct val="115000"/>
               </a:lnSpc>
             </a:pPr>
             <a:r>
-              <a:rPr sz="1200" b="1">
-                <a:solidFill>
-                  <a:srgbClr val="475569"/>
+              <a:rPr sz="1300" b="1">
+                <a:solidFill>
+                  <a:srgbClr val="0B1D3A"/>
                 </a:solidFill>
                 <a:latin typeface="PingFang SC"/>
               </a:rPr>
-              <a:t>连接池</a:t>
-            </a:r>
-          </a:p>
-        </p:txBody>
-      </p:sp>
-      <p:cxnSp>
-        <p:nvCxnSpPr>
-          <p:cNvPr id="22" name="Connector 21"/>
-          <p:cNvCxnSpPr/>
-          <p:nvPr/>
-        </p:nvCxnSpPr>
-        <p:spPr>
-          <a:xfrm>
-            <a:off x="6096000" y="3305174"/>
-            <a:ext cx="0" cy="152400"/>
-          </a:xfrm>
-          <a:prstGeom prst="line">
-            <a:avLst/>
-          </a:prstGeom>
-          <a:ln w="15240">
-            <a:solidFill>
-              <a:srgbClr val="94A3B8"/>
-            </a:solidFill>
-          </a:ln>
-        </p:spPr>
-        <p:style>
-          <a:lnRef idx="2">
-            <a:schemeClr val="accent1"/>
-          </a:lnRef>
-          <a:fillRef idx="0">
-            <a:schemeClr val="accent1"/>
-          </a:fillRef>
-          <a:effectRef idx="1">
-            <a:schemeClr val="accent1"/>
-          </a:effectRef>
-          <a:fontRef idx="minor">
-            <a:schemeClr val="tx1"/>
-          </a:fontRef>
-        </p:style>
-      </p:cxnSp>
-      <p:sp>
-        <p:nvSpPr>
-          <p:cNvPr id="23" name="Isosceles Triangle 22"/>
-          <p:cNvSpPr/>
-          <p:nvPr/>
-        </p:nvSpPr>
-        <p:spPr>
-          <a:xfrm rot="10800000">
-            <a:off x="6053138" y="3371850"/>
-            <a:ext cx="85725" cy="85725"/>
-          </a:xfrm>
-          <a:prstGeom prst="triangle">
-            <a:avLst/>
-          </a:prstGeom>
-          <a:solidFill>
-            <a:srgbClr val="94A3B8"/>
-          </a:solidFill>
-          <a:ln>
-            <a:noFill/>
-          </a:ln>
-          <a:effectLst/>
-        </p:spPr>
-        <p:style>
-          <a:lnRef idx="1">
-            <a:schemeClr val="accent1"/>
-          </a:lnRef>
-          <a:fillRef idx="3">
-            <a:schemeClr val="accent1"/>
-          </a:fillRef>
-          <a:effectRef idx="2">
-            <a:schemeClr val="accent1"/>
-          </a:effectRef>
-          <a:fontRef idx="minor">
-            <a:schemeClr val="lt1"/>
-          </a:fontRef>
-        </p:style>
-        <p:txBody>
-          <a:bodyPr rtlCol="0" anchor="ctr"/>
-          <a:lstStyle/>
-          <a:p>
-            <a:pPr algn="ctr"/>
-          </a:p>
-        </p:txBody>
-      </p:sp>
-      <p:sp>
-        <p:nvSpPr>
-          <p:cNvPr id="24" name="TextBox 23"/>
-          <p:cNvSpPr txBox="1"/>
-          <p:nvPr/>
-        </p:nvSpPr>
-        <p:spPr>
-          <a:xfrm>
-            <a:off x="6248400" y="3248024"/>
-            <a:ext cx="2095500" cy="247650"/>
-          </a:xfrm>
-          <a:prstGeom prst="rect">
-            <a:avLst/>
-          </a:prstGeom>
-          <a:noFill/>
-        </p:spPr>
-        <p:txBody>
-          <a:bodyPr wrap="square" anchor="ctr">
-            <a:spAutoFit/>
-          </a:bodyPr>
-          <a:lstStyle/>
-          <a:p>
-            <a:pPr algn="l">
-              <a:lnSpc>
-                <a:spcPct val="100000"/>
-              </a:lnSpc>
-            </a:pPr>
-            <a:r>
-              <a:rPr sz="1000" b="0">
-                <a:solidFill>
-                  <a:srgbClr val="94A3B8"/>
-                </a:solidFill>
-                <a:latin typeface="PingFang SC"/>
-              </a:rPr>
-              <a:t>调用</a:t>
-            </a:r>
-          </a:p>
-        </p:txBody>
-      </p:sp>
-      <p:sp>
-        <p:nvSpPr>
-          <p:cNvPr id="25" name="Rounded Rectangle 24"/>
-          <p:cNvSpPr/>
-          <p:nvPr/>
-        </p:nvSpPr>
-        <p:spPr>
-          <a:xfrm>
-            <a:off x="1847850" y="3457574"/>
-            <a:ext cx="8877300" cy="1100137"/>
+              <a:t>治理:白名单</a:t>
+            </a:r>
+          </a:p>
+        </p:txBody>
+      </p:sp>
+      <p:sp>
+        <p:nvSpPr>
+          <p:cNvPr id="52" name="Rounded Rectangle 51"/>
+          <p:cNvSpPr/>
+          <p:nvPr/>
+        </p:nvSpPr>
+        <p:spPr>
+          <a:xfrm>
+            <a:off x="4876800" y="4767261"/>
+            <a:ext cx="2819400" cy="1023937"/>
           </a:xfrm>
           <a:prstGeom prst="roundRect">
             <a:avLst>
@@ -6742,7 +7907,53 @@
             </a:avLst>
           </a:prstGeom>
           <a:solidFill>
-            <a:srgbClr val="F1F5F9"/>
+            <a:srgbClr val="FFFFFF"/>
+          </a:solidFill>
+          <a:ln w="12700">
+            <a:solidFill>
+              <a:srgbClr val="F59E0B"/>
+            </a:solidFill>
+          </a:ln>
+          <a:effectLst/>
+        </p:spPr>
+        <p:style>
+          <a:lnRef idx="1">
+            <a:schemeClr val="accent1"/>
+          </a:lnRef>
+          <a:fillRef idx="3">
+            <a:schemeClr val="accent1"/>
+          </a:fillRef>
+          <a:effectRef idx="2">
+            <a:schemeClr val="accent1"/>
+          </a:effectRef>
+          <a:fontRef idx="minor">
+            <a:schemeClr val="lt1"/>
+          </a:fontRef>
+        </p:style>
+        <p:txBody>
+          <a:bodyPr rtlCol="0" anchor="ctr"/>
+          <a:lstStyle/>
+          <a:p>
+            <a:pPr algn="ctr"/>
+          </a:p>
+        </p:txBody>
+      </p:sp>
+      <p:sp>
+        <p:nvSpPr>
+          <p:cNvPr id="53" name="Rectangle 52"/>
+          <p:cNvSpPr/>
+          <p:nvPr/>
+        </p:nvSpPr>
+        <p:spPr>
+          <a:xfrm>
+            <a:off x="4876800" y="4767261"/>
+            <a:ext cx="47625" cy="1023937"/>
+          </a:xfrm>
+          <a:prstGeom prst="rect">
+            <a:avLst/>
+          </a:prstGeom>
+          <a:solidFill>
+            <a:srgbClr val="F59E0B"/>
           </a:solidFill>
           <a:ln>
             <a:noFill/>
@@ -6773,14 +7984,53 @@
       </p:sp>
       <p:sp>
         <p:nvSpPr>
-          <p:cNvPr id="26" name="Rounded Rectangle 25"/>
-          <p:cNvSpPr/>
-          <p:nvPr/>
-        </p:nvSpPr>
-        <p:spPr>
-          <a:xfrm>
-            <a:off x="1905000" y="3495674"/>
-            <a:ext cx="2076450" cy="1023937"/>
+          <p:cNvPr id="54" name="TextBox 53"/>
+          <p:cNvSpPr txBox="1"/>
+          <p:nvPr/>
+        </p:nvSpPr>
+        <p:spPr>
+          <a:xfrm>
+            <a:off x="5029200" y="4767261"/>
+            <a:ext cx="2552700" cy="1023937"/>
+          </a:xfrm>
+          <a:prstGeom prst="rect">
+            <a:avLst/>
+          </a:prstGeom>
+          <a:noFill/>
+        </p:spPr>
+        <p:txBody>
+          <a:bodyPr wrap="none" anchor="ctr">
+            <a:spAutoFit/>
+          </a:bodyPr>
+          <a:lstStyle/>
+          <a:p>
+            <a:pPr algn="l">
+              <a:lnSpc>
+                <a:spcPct val="115000"/>
+              </a:lnSpc>
+            </a:pPr>
+            <a:r>
+              <a:rPr sz="1300" b="1">
+                <a:solidFill>
+                  <a:srgbClr val="0B1D3A"/>
+                </a:solidFill>
+                <a:latin typeface="PingFang SC"/>
+              </a:rPr>
+              <a:t>审计</a:t>
+            </a:r>
+          </a:p>
+        </p:txBody>
+      </p:sp>
+      <p:sp>
+        <p:nvSpPr>
+          <p:cNvPr id="55" name="Rounded Rectangle 54"/>
+          <p:cNvSpPr/>
+          <p:nvPr/>
+        </p:nvSpPr>
+        <p:spPr>
+          <a:xfrm>
+            <a:off x="7848600" y="4767261"/>
+            <a:ext cx="2819400" cy="1023937"/>
           </a:xfrm>
           <a:prstGeom prst="roundRect">
             <a:avLst>
@@ -6792,7 +8042,7 @@
           </a:solidFill>
           <a:ln w="12700">
             <a:solidFill>
-              <a:srgbClr val="8B5CF6"/>
+              <a:srgbClr val="F59E0B"/>
             </a:solidFill>
           </a:ln>
           <a:effectLst/>
@@ -6821,20 +8071,20 @@
       </p:sp>
       <p:sp>
         <p:nvSpPr>
-          <p:cNvPr id="27" name="Rectangle 26"/>
-          <p:cNvSpPr/>
-          <p:nvPr/>
-        </p:nvSpPr>
-        <p:spPr>
-          <a:xfrm>
-            <a:off x="1905000" y="3495674"/>
+          <p:cNvPr id="56" name="Rectangle 55"/>
+          <p:cNvSpPr/>
+          <p:nvPr/>
+        </p:nvSpPr>
+        <p:spPr>
+          <a:xfrm>
+            <a:off x="7848600" y="4767261"/>
             <a:ext cx="47625" cy="1023937"/>
           </a:xfrm>
           <a:prstGeom prst="rect">
             <a:avLst/>
           </a:prstGeom>
           <a:solidFill>
-            <a:srgbClr val="8B5CF6"/>
+            <a:srgbClr val="F59E0B"/>
           </a:solidFill>
           <a:ln>
             <a:noFill/>
@@ -6865,14 +8115,14 @@
       </p:sp>
       <p:sp>
         <p:nvSpPr>
-          <p:cNvPr id="28" name="TextBox 27"/>
+          <p:cNvPr id="57" name="TextBox 56"/>
           <p:cNvSpPr txBox="1"/>
           <p:nvPr/>
         </p:nvSpPr>
         <p:spPr>
           <a:xfrm>
-            <a:off x="2038350" y="3495674"/>
-            <a:ext cx="1847850" cy="1023937"/>
+            <a:off x="8001000" y="4767261"/>
+            <a:ext cx="2552700" cy="1023937"/>
           </a:xfrm>
           <a:prstGeom prst="rect">
             <a:avLst/>
@@ -6880,970 +8130,20 @@
           <a:noFill/>
         </p:spPr>
         <p:txBody>
-          <a:bodyPr wrap="square" anchor="ctr">
+          <a:bodyPr wrap="none" anchor="ctr">
             <a:spAutoFit/>
           </a:bodyPr>
           <a:lstStyle/>
           <a:p>
             <a:pPr algn="l">
               <a:lnSpc>
-                <a:spcPct val="100000"/>
+                <a:spcPct val="115000"/>
               </a:lnSpc>
             </a:pPr>
             <a:r>
-              <a:rPr sz="1200" b="1">
-                <a:solidFill>
-                  <a:srgbClr val="475569"/>
-                </a:solidFill>
-                <a:latin typeface="PingFang SC"/>
-              </a:rPr>
-              <a:t>MCP Server 群:文件系统</a:t>
-            </a:r>
-          </a:p>
-        </p:txBody>
-      </p:sp>
-      <p:sp>
-        <p:nvSpPr>
-          <p:cNvPr id="29" name="Rounded Rectangle 28"/>
-          <p:cNvSpPr/>
-          <p:nvPr/>
-        </p:nvSpPr>
-        <p:spPr>
-          <a:xfrm>
-            <a:off x="4133850" y="3495674"/>
-            <a:ext cx="2076450" cy="1023937"/>
-          </a:xfrm>
-          <a:prstGeom prst="roundRect">
-            <a:avLst>
-              <a:gd name="adj" fmla="val 8000"/>
-            </a:avLst>
-          </a:prstGeom>
-          <a:solidFill>
-            <a:srgbClr val="FFFFFF"/>
-          </a:solidFill>
-          <a:ln w="12700">
-            <a:solidFill>
-              <a:srgbClr val="8B5CF6"/>
-            </a:solidFill>
-          </a:ln>
-          <a:effectLst/>
-        </p:spPr>
-        <p:style>
-          <a:lnRef idx="1">
-            <a:schemeClr val="accent1"/>
-          </a:lnRef>
-          <a:fillRef idx="3">
-            <a:schemeClr val="accent1"/>
-          </a:fillRef>
-          <a:effectRef idx="2">
-            <a:schemeClr val="accent1"/>
-          </a:effectRef>
-          <a:fontRef idx="minor">
-            <a:schemeClr val="lt1"/>
-          </a:fontRef>
-        </p:style>
-        <p:txBody>
-          <a:bodyPr rtlCol="0" anchor="ctr"/>
-          <a:lstStyle/>
-          <a:p>
-            <a:pPr algn="ctr"/>
-          </a:p>
-        </p:txBody>
-      </p:sp>
-      <p:sp>
-        <p:nvSpPr>
-          <p:cNvPr id="30" name="Rectangle 29"/>
-          <p:cNvSpPr/>
-          <p:nvPr/>
-        </p:nvSpPr>
-        <p:spPr>
-          <a:xfrm>
-            <a:off x="4133850" y="3495674"/>
-            <a:ext cx="47625" cy="1023937"/>
-          </a:xfrm>
-          <a:prstGeom prst="rect">
-            <a:avLst/>
-          </a:prstGeom>
-          <a:solidFill>
-            <a:srgbClr val="8B5CF6"/>
-          </a:solidFill>
-          <a:ln>
-            <a:noFill/>
-          </a:ln>
-          <a:effectLst/>
-        </p:spPr>
-        <p:style>
-          <a:lnRef idx="1">
-            <a:schemeClr val="accent1"/>
-          </a:lnRef>
-          <a:fillRef idx="3">
-            <a:schemeClr val="accent1"/>
-          </a:fillRef>
-          <a:effectRef idx="2">
-            <a:schemeClr val="accent1"/>
-          </a:effectRef>
-          <a:fontRef idx="minor">
-            <a:schemeClr val="lt1"/>
-          </a:fontRef>
-        </p:style>
-        <p:txBody>
-          <a:bodyPr rtlCol="0" anchor="ctr"/>
-          <a:lstStyle/>
-          <a:p>
-            <a:pPr algn="ctr"/>
-          </a:p>
-        </p:txBody>
-      </p:sp>
-      <p:sp>
-        <p:nvSpPr>
-          <p:cNvPr id="31" name="TextBox 30"/>
-          <p:cNvSpPr txBox="1"/>
-          <p:nvPr/>
-        </p:nvSpPr>
-        <p:spPr>
-          <a:xfrm>
-            <a:off x="4267200" y="3495674"/>
-            <a:ext cx="1847850" cy="1023937"/>
-          </a:xfrm>
-          <a:prstGeom prst="rect">
-            <a:avLst/>
-          </a:prstGeom>
-          <a:noFill/>
-        </p:spPr>
-        <p:txBody>
-          <a:bodyPr wrap="square" anchor="ctr">
-            <a:spAutoFit/>
-          </a:bodyPr>
-          <a:lstStyle/>
-          <a:p>
-            <a:pPr algn="l">
-              <a:lnSpc>
-                <a:spcPct val="100000"/>
-              </a:lnSpc>
-            </a:pPr>
-            <a:r>
-              <a:rPr sz="1200" b="1">
-                <a:solidFill>
-                  <a:srgbClr val="475569"/>
-                </a:solidFill>
-                <a:latin typeface="PingFang SC"/>
-              </a:rPr>
-              <a:t>数据库</a:t>
-            </a:r>
-          </a:p>
-        </p:txBody>
-      </p:sp>
-      <p:sp>
-        <p:nvSpPr>
-          <p:cNvPr id="32" name="Rounded Rectangle 31"/>
-          <p:cNvSpPr/>
-          <p:nvPr/>
-        </p:nvSpPr>
-        <p:spPr>
-          <a:xfrm>
-            <a:off x="6362700" y="3495674"/>
-            <a:ext cx="2076450" cy="1023937"/>
-          </a:xfrm>
-          <a:prstGeom prst="roundRect">
-            <a:avLst>
-              <a:gd name="adj" fmla="val 8000"/>
-            </a:avLst>
-          </a:prstGeom>
-          <a:solidFill>
-            <a:srgbClr val="FFFFFF"/>
-          </a:solidFill>
-          <a:ln w="12700">
-            <a:solidFill>
-              <a:srgbClr val="8B5CF6"/>
-            </a:solidFill>
-          </a:ln>
-          <a:effectLst/>
-        </p:spPr>
-        <p:style>
-          <a:lnRef idx="1">
-            <a:schemeClr val="accent1"/>
-          </a:lnRef>
-          <a:fillRef idx="3">
-            <a:schemeClr val="accent1"/>
-          </a:fillRef>
-          <a:effectRef idx="2">
-            <a:schemeClr val="accent1"/>
-          </a:effectRef>
-          <a:fontRef idx="minor">
-            <a:schemeClr val="lt1"/>
-          </a:fontRef>
-        </p:style>
-        <p:txBody>
-          <a:bodyPr rtlCol="0" anchor="ctr"/>
-          <a:lstStyle/>
-          <a:p>
-            <a:pPr algn="ctr"/>
-          </a:p>
-        </p:txBody>
-      </p:sp>
-      <p:sp>
-        <p:nvSpPr>
-          <p:cNvPr id="33" name="Rectangle 32"/>
-          <p:cNvSpPr/>
-          <p:nvPr/>
-        </p:nvSpPr>
-        <p:spPr>
-          <a:xfrm>
-            <a:off x="6362700" y="3495674"/>
-            <a:ext cx="47625" cy="1023937"/>
-          </a:xfrm>
-          <a:prstGeom prst="rect">
-            <a:avLst/>
-          </a:prstGeom>
-          <a:solidFill>
-            <a:srgbClr val="8B5CF6"/>
-          </a:solidFill>
-          <a:ln>
-            <a:noFill/>
-          </a:ln>
-          <a:effectLst/>
-        </p:spPr>
-        <p:style>
-          <a:lnRef idx="1">
-            <a:schemeClr val="accent1"/>
-          </a:lnRef>
-          <a:fillRef idx="3">
-            <a:schemeClr val="accent1"/>
-          </a:fillRef>
-          <a:effectRef idx="2">
-            <a:schemeClr val="accent1"/>
-          </a:effectRef>
-          <a:fontRef idx="minor">
-            <a:schemeClr val="lt1"/>
-          </a:fontRef>
-        </p:style>
-        <p:txBody>
-          <a:bodyPr rtlCol="0" anchor="ctr"/>
-          <a:lstStyle/>
-          <a:p>
-            <a:pPr algn="ctr"/>
-          </a:p>
-        </p:txBody>
-      </p:sp>
-      <p:sp>
-        <p:nvSpPr>
-          <p:cNvPr id="34" name="TextBox 33"/>
-          <p:cNvSpPr txBox="1"/>
-          <p:nvPr/>
-        </p:nvSpPr>
-        <p:spPr>
-          <a:xfrm>
-            <a:off x="6496050" y="3495674"/>
-            <a:ext cx="1847850" cy="1023937"/>
-          </a:xfrm>
-          <a:prstGeom prst="rect">
-            <a:avLst/>
-          </a:prstGeom>
-          <a:noFill/>
-        </p:spPr>
-        <p:txBody>
-          <a:bodyPr wrap="square" anchor="ctr">
-            <a:spAutoFit/>
-          </a:bodyPr>
-          <a:lstStyle/>
-          <a:p>
-            <a:pPr algn="l">
-              <a:lnSpc>
-                <a:spcPct val="100000"/>
-              </a:lnSpc>
-            </a:pPr>
-            <a:r>
-              <a:rPr sz="1200" b="1">
-                <a:solidFill>
-                  <a:srgbClr val="475569"/>
-                </a:solidFill>
-                <a:latin typeface="PingFang SC"/>
-              </a:rPr>
-              <a:t>GitHub</a:t>
-            </a:r>
-          </a:p>
-        </p:txBody>
-      </p:sp>
-      <p:sp>
-        <p:nvSpPr>
-          <p:cNvPr id="35" name="Rounded Rectangle 34"/>
-          <p:cNvSpPr/>
-          <p:nvPr/>
-        </p:nvSpPr>
-        <p:spPr>
-          <a:xfrm>
-            <a:off x="8591550" y="3495674"/>
-            <a:ext cx="2076450" cy="1023937"/>
-          </a:xfrm>
-          <a:prstGeom prst="roundRect">
-            <a:avLst>
-              <a:gd name="adj" fmla="val 8000"/>
-            </a:avLst>
-          </a:prstGeom>
-          <a:solidFill>
-            <a:srgbClr val="FFFFFF"/>
-          </a:solidFill>
-          <a:ln w="12700">
-            <a:solidFill>
-              <a:srgbClr val="8B5CF6"/>
-            </a:solidFill>
-          </a:ln>
-          <a:effectLst/>
-        </p:spPr>
-        <p:style>
-          <a:lnRef idx="1">
-            <a:schemeClr val="accent1"/>
-          </a:lnRef>
-          <a:fillRef idx="3">
-            <a:schemeClr val="accent1"/>
-          </a:fillRef>
-          <a:effectRef idx="2">
-            <a:schemeClr val="accent1"/>
-          </a:effectRef>
-          <a:fontRef idx="minor">
-            <a:schemeClr val="lt1"/>
-          </a:fontRef>
-        </p:style>
-        <p:txBody>
-          <a:bodyPr rtlCol="0" anchor="ctr"/>
-          <a:lstStyle/>
-          <a:p>
-            <a:pPr algn="ctr"/>
-          </a:p>
-        </p:txBody>
-      </p:sp>
-      <p:sp>
-        <p:nvSpPr>
-          <p:cNvPr id="36" name="Rectangle 35"/>
-          <p:cNvSpPr/>
-          <p:nvPr/>
-        </p:nvSpPr>
-        <p:spPr>
-          <a:xfrm>
-            <a:off x="8591550" y="3495674"/>
-            <a:ext cx="47625" cy="1023937"/>
-          </a:xfrm>
-          <a:prstGeom prst="rect">
-            <a:avLst/>
-          </a:prstGeom>
-          <a:solidFill>
-            <a:srgbClr val="8B5CF6"/>
-          </a:solidFill>
-          <a:ln>
-            <a:noFill/>
-          </a:ln>
-          <a:effectLst/>
-        </p:spPr>
-        <p:style>
-          <a:lnRef idx="1">
-            <a:schemeClr val="accent1"/>
-          </a:lnRef>
-          <a:fillRef idx="3">
-            <a:schemeClr val="accent1"/>
-          </a:fillRef>
-          <a:effectRef idx="2">
-            <a:schemeClr val="accent1"/>
-          </a:effectRef>
-          <a:fontRef idx="minor">
-            <a:schemeClr val="lt1"/>
-          </a:fontRef>
-        </p:style>
-        <p:txBody>
-          <a:bodyPr rtlCol="0" anchor="ctr"/>
-          <a:lstStyle/>
-          <a:p>
-            <a:pPr algn="ctr"/>
-          </a:p>
-        </p:txBody>
-      </p:sp>
-      <p:sp>
-        <p:nvSpPr>
-          <p:cNvPr id="37" name="TextBox 36"/>
-          <p:cNvSpPr txBox="1"/>
-          <p:nvPr/>
-        </p:nvSpPr>
-        <p:spPr>
-          <a:xfrm>
-            <a:off x="8724900" y="3495674"/>
-            <a:ext cx="1847850" cy="1023937"/>
-          </a:xfrm>
-          <a:prstGeom prst="rect">
-            <a:avLst/>
-          </a:prstGeom>
-          <a:noFill/>
-        </p:spPr>
-        <p:txBody>
-          <a:bodyPr wrap="square" anchor="ctr">
-            <a:spAutoFit/>
-          </a:bodyPr>
-          <a:lstStyle/>
-          <a:p>
-            <a:pPr algn="l">
-              <a:lnSpc>
-                <a:spcPct val="100000"/>
-              </a:lnSpc>
-            </a:pPr>
-            <a:r>
-              <a:rPr sz="1200" b="1">
-                <a:solidFill>
-                  <a:srgbClr val="475569"/>
-                </a:solidFill>
-                <a:latin typeface="PingFang SC"/>
-              </a:rPr>
-              <a:t>内部 API</a:t>
-            </a:r>
-          </a:p>
-        </p:txBody>
-      </p:sp>
-      <p:cxnSp>
-        <p:nvCxnSpPr>
-          <p:cNvPr id="38" name="Connector 37"/>
-          <p:cNvCxnSpPr/>
-          <p:nvPr/>
-        </p:nvCxnSpPr>
-        <p:spPr>
-          <a:xfrm>
-            <a:off x="6096000" y="4576761"/>
-            <a:ext cx="0" cy="152400"/>
-          </a:xfrm>
-          <a:prstGeom prst="line">
-            <a:avLst/>
-          </a:prstGeom>
-          <a:ln w="15240">
-            <a:solidFill>
-              <a:srgbClr val="94A3B8"/>
-            </a:solidFill>
-          </a:ln>
-        </p:spPr>
-        <p:style>
-          <a:lnRef idx="2">
-            <a:schemeClr val="accent1"/>
-          </a:lnRef>
-          <a:fillRef idx="0">
-            <a:schemeClr val="accent1"/>
-          </a:fillRef>
-          <a:effectRef idx="1">
-            <a:schemeClr val="accent1"/>
-          </a:effectRef>
-          <a:fontRef idx="minor">
-            <a:schemeClr val="tx1"/>
-          </a:fontRef>
-        </p:style>
-      </p:cxnSp>
-      <p:sp>
-        <p:nvSpPr>
-          <p:cNvPr id="39" name="Isosceles Triangle 38"/>
-          <p:cNvSpPr/>
-          <p:nvPr/>
-        </p:nvSpPr>
-        <p:spPr>
-          <a:xfrm rot="10800000">
-            <a:off x="6053138" y="4643437"/>
-            <a:ext cx="85725" cy="85725"/>
-          </a:xfrm>
-          <a:prstGeom prst="triangle">
-            <a:avLst/>
-          </a:prstGeom>
-          <a:solidFill>
-            <a:srgbClr val="94A3B8"/>
-          </a:solidFill>
-          <a:ln>
-            <a:noFill/>
-          </a:ln>
-          <a:effectLst/>
-        </p:spPr>
-        <p:style>
-          <a:lnRef idx="1">
-            <a:schemeClr val="accent1"/>
-          </a:lnRef>
-          <a:fillRef idx="3">
-            <a:schemeClr val="accent1"/>
-          </a:fillRef>
-          <a:effectRef idx="2">
-            <a:schemeClr val="accent1"/>
-          </a:effectRef>
-          <a:fontRef idx="minor">
-            <a:schemeClr val="lt1"/>
-          </a:fontRef>
-        </p:style>
-        <p:txBody>
-          <a:bodyPr rtlCol="0" anchor="ctr"/>
-          <a:lstStyle/>
-          <a:p>
-            <a:pPr algn="ctr"/>
-          </a:p>
-        </p:txBody>
-      </p:sp>
-      <p:sp>
-        <p:nvSpPr>
-          <p:cNvPr id="40" name="TextBox 39"/>
-          <p:cNvSpPr txBox="1"/>
-          <p:nvPr/>
-        </p:nvSpPr>
-        <p:spPr>
-          <a:xfrm>
-            <a:off x="6248400" y="4519611"/>
-            <a:ext cx="2095500" cy="247650"/>
-          </a:xfrm>
-          <a:prstGeom prst="rect">
-            <a:avLst/>
-          </a:prstGeom>
-          <a:noFill/>
-        </p:spPr>
-        <p:txBody>
-          <a:bodyPr wrap="square" anchor="ctr">
-            <a:spAutoFit/>
-          </a:bodyPr>
-          <a:lstStyle/>
-          <a:p>
-            <a:pPr algn="l">
-              <a:lnSpc>
-                <a:spcPct val="100000"/>
-              </a:lnSpc>
-            </a:pPr>
-            <a:r>
-              <a:rPr sz="1000" b="0">
-                <a:solidFill>
-                  <a:srgbClr val="94A3B8"/>
-                </a:solidFill>
-                <a:latin typeface="PingFang SC"/>
-              </a:rPr>
-              <a:t>治理</a:t>
-            </a:r>
-          </a:p>
-        </p:txBody>
-      </p:sp>
-      <p:sp>
-        <p:nvSpPr>
-          <p:cNvPr id="41" name="Rounded Rectangle 40"/>
-          <p:cNvSpPr/>
-          <p:nvPr/>
-        </p:nvSpPr>
-        <p:spPr>
-          <a:xfrm>
-            <a:off x="1847850" y="4729161"/>
-            <a:ext cx="8877300" cy="1100137"/>
-          </a:xfrm>
-          <a:prstGeom prst="roundRect">
-            <a:avLst>
-              <a:gd name="adj" fmla="val 8000"/>
-            </a:avLst>
-          </a:prstGeom>
-          <a:solidFill>
-            <a:srgbClr val="F1F5F9"/>
-          </a:solidFill>
-          <a:ln>
-            <a:noFill/>
-          </a:ln>
-          <a:effectLst/>
-        </p:spPr>
-        <p:style>
-          <a:lnRef idx="1">
-            <a:schemeClr val="accent1"/>
-          </a:lnRef>
-          <a:fillRef idx="3">
-            <a:schemeClr val="accent1"/>
-          </a:fillRef>
-          <a:effectRef idx="2">
-            <a:schemeClr val="accent1"/>
-          </a:effectRef>
-          <a:fontRef idx="minor">
-            <a:schemeClr val="lt1"/>
-          </a:fontRef>
-        </p:style>
-        <p:txBody>
-          <a:bodyPr rtlCol="0" anchor="ctr"/>
-          <a:lstStyle/>
-          <a:p>
-            <a:pPr algn="ctr"/>
-          </a:p>
-        </p:txBody>
-      </p:sp>
-      <p:sp>
-        <p:nvSpPr>
-          <p:cNvPr id="42" name="Rounded Rectangle 41"/>
-          <p:cNvSpPr/>
-          <p:nvPr/>
-        </p:nvSpPr>
-        <p:spPr>
-          <a:xfrm>
-            <a:off x="1905000" y="4767261"/>
-            <a:ext cx="2819400" cy="1023937"/>
-          </a:xfrm>
-          <a:prstGeom prst="roundRect">
-            <a:avLst>
-              <a:gd name="adj" fmla="val 8000"/>
-            </a:avLst>
-          </a:prstGeom>
-          <a:solidFill>
-            <a:srgbClr val="FFFFFF"/>
-          </a:solidFill>
-          <a:ln w="12700">
-            <a:solidFill>
-              <a:srgbClr val="F59E0B"/>
-            </a:solidFill>
-          </a:ln>
-          <a:effectLst/>
-        </p:spPr>
-        <p:style>
-          <a:lnRef idx="1">
-            <a:schemeClr val="accent1"/>
-          </a:lnRef>
-          <a:fillRef idx="3">
-            <a:schemeClr val="accent1"/>
-          </a:fillRef>
-          <a:effectRef idx="2">
-            <a:schemeClr val="accent1"/>
-          </a:effectRef>
-          <a:fontRef idx="minor">
-            <a:schemeClr val="lt1"/>
-          </a:fontRef>
-        </p:style>
-        <p:txBody>
-          <a:bodyPr rtlCol="0" anchor="ctr"/>
-          <a:lstStyle/>
-          <a:p>
-            <a:pPr algn="ctr"/>
-          </a:p>
-        </p:txBody>
-      </p:sp>
-      <p:sp>
-        <p:nvSpPr>
-          <p:cNvPr id="43" name="Rectangle 42"/>
-          <p:cNvSpPr/>
-          <p:nvPr/>
-        </p:nvSpPr>
-        <p:spPr>
-          <a:xfrm>
-            <a:off x="1905000" y="4767261"/>
-            <a:ext cx="47625" cy="1023937"/>
-          </a:xfrm>
-          <a:prstGeom prst="rect">
-            <a:avLst/>
-          </a:prstGeom>
-          <a:solidFill>
-            <a:srgbClr val="F59E0B"/>
-          </a:solidFill>
-          <a:ln>
-            <a:noFill/>
-          </a:ln>
-          <a:effectLst/>
-        </p:spPr>
-        <p:style>
-          <a:lnRef idx="1">
-            <a:schemeClr val="accent1"/>
-          </a:lnRef>
-          <a:fillRef idx="3">
-            <a:schemeClr val="accent1"/>
-          </a:fillRef>
-          <a:effectRef idx="2">
-            <a:schemeClr val="accent1"/>
-          </a:effectRef>
-          <a:fontRef idx="minor">
-            <a:schemeClr val="lt1"/>
-          </a:fontRef>
-        </p:style>
-        <p:txBody>
-          <a:bodyPr rtlCol="0" anchor="ctr"/>
-          <a:lstStyle/>
-          <a:p>
-            <a:pPr algn="ctr"/>
-          </a:p>
-        </p:txBody>
-      </p:sp>
-      <p:sp>
-        <p:nvSpPr>
-          <p:cNvPr id="44" name="TextBox 43"/>
-          <p:cNvSpPr txBox="1"/>
-          <p:nvPr/>
-        </p:nvSpPr>
-        <p:spPr>
-          <a:xfrm>
-            <a:off x="2038350" y="4767261"/>
-            <a:ext cx="2590800" cy="1023937"/>
-          </a:xfrm>
-          <a:prstGeom prst="rect">
-            <a:avLst/>
-          </a:prstGeom>
-          <a:noFill/>
-        </p:spPr>
-        <p:txBody>
-          <a:bodyPr wrap="square" anchor="ctr">
-            <a:spAutoFit/>
-          </a:bodyPr>
-          <a:lstStyle/>
-          <a:p>
-            <a:pPr algn="l">
-              <a:lnSpc>
-                <a:spcPct val="100000"/>
-              </a:lnSpc>
-            </a:pPr>
-            <a:r>
-              <a:rPr sz="1200" b="1">
-                <a:solidFill>
-                  <a:srgbClr val="475569"/>
-                </a:solidFill>
-                <a:latin typeface="PingFang SC"/>
-              </a:rPr>
-              <a:t>治理:白名单</a:t>
-            </a:r>
-          </a:p>
-        </p:txBody>
-      </p:sp>
-      <p:sp>
-        <p:nvSpPr>
-          <p:cNvPr id="45" name="Rounded Rectangle 44"/>
-          <p:cNvSpPr/>
-          <p:nvPr/>
-        </p:nvSpPr>
-        <p:spPr>
-          <a:xfrm>
-            <a:off x="4876800" y="4767261"/>
-            <a:ext cx="2819400" cy="1023937"/>
-          </a:xfrm>
-          <a:prstGeom prst="roundRect">
-            <a:avLst>
-              <a:gd name="adj" fmla="val 8000"/>
-            </a:avLst>
-          </a:prstGeom>
-          <a:solidFill>
-            <a:srgbClr val="FFFFFF"/>
-          </a:solidFill>
-          <a:ln w="12700">
-            <a:solidFill>
-              <a:srgbClr val="F59E0B"/>
-            </a:solidFill>
-          </a:ln>
-          <a:effectLst/>
-        </p:spPr>
-        <p:style>
-          <a:lnRef idx="1">
-            <a:schemeClr val="accent1"/>
-          </a:lnRef>
-          <a:fillRef idx="3">
-            <a:schemeClr val="accent1"/>
-          </a:fillRef>
-          <a:effectRef idx="2">
-            <a:schemeClr val="accent1"/>
-          </a:effectRef>
-          <a:fontRef idx="minor">
-            <a:schemeClr val="lt1"/>
-          </a:fontRef>
-        </p:style>
-        <p:txBody>
-          <a:bodyPr rtlCol="0" anchor="ctr"/>
-          <a:lstStyle/>
-          <a:p>
-            <a:pPr algn="ctr"/>
-          </a:p>
-        </p:txBody>
-      </p:sp>
-      <p:sp>
-        <p:nvSpPr>
-          <p:cNvPr id="46" name="Rectangle 45"/>
-          <p:cNvSpPr/>
-          <p:nvPr/>
-        </p:nvSpPr>
-        <p:spPr>
-          <a:xfrm>
-            <a:off x="4876800" y="4767261"/>
-            <a:ext cx="47625" cy="1023937"/>
-          </a:xfrm>
-          <a:prstGeom prst="rect">
-            <a:avLst/>
-          </a:prstGeom>
-          <a:solidFill>
-            <a:srgbClr val="F59E0B"/>
-          </a:solidFill>
-          <a:ln>
-            <a:noFill/>
-          </a:ln>
-          <a:effectLst/>
-        </p:spPr>
-        <p:style>
-          <a:lnRef idx="1">
-            <a:schemeClr val="accent1"/>
-          </a:lnRef>
-          <a:fillRef idx="3">
-            <a:schemeClr val="accent1"/>
-          </a:fillRef>
-          <a:effectRef idx="2">
-            <a:schemeClr val="accent1"/>
-          </a:effectRef>
-          <a:fontRef idx="minor">
-            <a:schemeClr val="lt1"/>
-          </a:fontRef>
-        </p:style>
-        <p:txBody>
-          <a:bodyPr rtlCol="0" anchor="ctr"/>
-          <a:lstStyle/>
-          <a:p>
-            <a:pPr algn="ctr"/>
-          </a:p>
-        </p:txBody>
-      </p:sp>
-      <p:sp>
-        <p:nvSpPr>
-          <p:cNvPr id="47" name="TextBox 46"/>
-          <p:cNvSpPr txBox="1"/>
-          <p:nvPr/>
-        </p:nvSpPr>
-        <p:spPr>
-          <a:xfrm>
-            <a:off x="5010150" y="4767261"/>
-            <a:ext cx="2590800" cy="1023937"/>
-          </a:xfrm>
-          <a:prstGeom prst="rect">
-            <a:avLst/>
-          </a:prstGeom>
-          <a:noFill/>
-        </p:spPr>
-        <p:txBody>
-          <a:bodyPr wrap="square" anchor="ctr">
-            <a:spAutoFit/>
-          </a:bodyPr>
-          <a:lstStyle/>
-          <a:p>
-            <a:pPr algn="l">
-              <a:lnSpc>
-                <a:spcPct val="100000"/>
-              </a:lnSpc>
-            </a:pPr>
-            <a:r>
-              <a:rPr sz="1200" b="1">
-                <a:solidFill>
-                  <a:srgbClr val="475569"/>
-                </a:solidFill>
-                <a:latin typeface="PingFang SC"/>
-              </a:rPr>
-              <a:t>审计</a:t>
-            </a:r>
-          </a:p>
-        </p:txBody>
-      </p:sp>
-      <p:sp>
-        <p:nvSpPr>
-          <p:cNvPr id="48" name="Rounded Rectangle 47"/>
-          <p:cNvSpPr/>
-          <p:nvPr/>
-        </p:nvSpPr>
-        <p:spPr>
-          <a:xfrm>
-            <a:off x="7848600" y="4767261"/>
-            <a:ext cx="2819400" cy="1023937"/>
-          </a:xfrm>
-          <a:prstGeom prst="roundRect">
-            <a:avLst>
-              <a:gd name="adj" fmla="val 8000"/>
-            </a:avLst>
-          </a:prstGeom>
-          <a:solidFill>
-            <a:srgbClr val="FFFFFF"/>
-          </a:solidFill>
-          <a:ln w="12700">
-            <a:solidFill>
-              <a:srgbClr val="F59E0B"/>
-            </a:solidFill>
-          </a:ln>
-          <a:effectLst/>
-        </p:spPr>
-        <p:style>
-          <a:lnRef idx="1">
-            <a:schemeClr val="accent1"/>
-          </a:lnRef>
-          <a:fillRef idx="3">
-            <a:schemeClr val="accent1"/>
-          </a:fillRef>
-          <a:effectRef idx="2">
-            <a:schemeClr val="accent1"/>
-          </a:effectRef>
-          <a:fontRef idx="minor">
-            <a:schemeClr val="lt1"/>
-          </a:fontRef>
-        </p:style>
-        <p:txBody>
-          <a:bodyPr rtlCol="0" anchor="ctr"/>
-          <a:lstStyle/>
-          <a:p>
-            <a:pPr algn="ctr"/>
-          </a:p>
-        </p:txBody>
-      </p:sp>
-      <p:sp>
-        <p:nvSpPr>
-          <p:cNvPr id="49" name="Rectangle 48"/>
-          <p:cNvSpPr/>
-          <p:nvPr/>
-        </p:nvSpPr>
-        <p:spPr>
-          <a:xfrm>
-            <a:off x="7848600" y="4767261"/>
-            <a:ext cx="47625" cy="1023937"/>
-          </a:xfrm>
-          <a:prstGeom prst="rect">
-            <a:avLst/>
-          </a:prstGeom>
-          <a:solidFill>
-            <a:srgbClr val="F59E0B"/>
-          </a:solidFill>
-          <a:ln>
-            <a:noFill/>
-          </a:ln>
-          <a:effectLst/>
-        </p:spPr>
-        <p:style>
-          <a:lnRef idx="1">
-            <a:schemeClr val="accent1"/>
-          </a:lnRef>
-          <a:fillRef idx="3">
-            <a:schemeClr val="accent1"/>
-          </a:fillRef>
-          <a:effectRef idx="2">
-            <a:schemeClr val="accent1"/>
-          </a:effectRef>
-          <a:fontRef idx="minor">
-            <a:schemeClr val="lt1"/>
-          </a:fontRef>
-        </p:style>
-        <p:txBody>
-          <a:bodyPr rtlCol="0" anchor="ctr"/>
-          <a:lstStyle/>
-          <a:p>
-            <a:pPr algn="ctr"/>
-          </a:p>
-        </p:txBody>
-      </p:sp>
-      <p:sp>
-        <p:nvSpPr>
-          <p:cNvPr id="50" name="TextBox 49"/>
-          <p:cNvSpPr txBox="1"/>
-          <p:nvPr/>
-        </p:nvSpPr>
-        <p:spPr>
-          <a:xfrm>
-            <a:off x="7981950" y="4767261"/>
-            <a:ext cx="2590800" cy="1023937"/>
-          </a:xfrm>
-          <a:prstGeom prst="rect">
-            <a:avLst/>
-          </a:prstGeom>
-          <a:noFill/>
-        </p:spPr>
-        <p:txBody>
-          <a:bodyPr wrap="square" anchor="ctr">
-            <a:spAutoFit/>
-          </a:bodyPr>
-          <a:lstStyle/>
-          <a:p>
-            <a:pPr algn="l">
-              <a:lnSpc>
-                <a:spcPct val="100000"/>
-              </a:lnSpc>
-            </a:pPr>
-            <a:r>
-              <a:rPr sz="1200" b="1">
-                <a:solidFill>
-                  <a:srgbClr val="475569"/>
+              <a:rPr sz="1300" b="1">
+                <a:solidFill>
+                  <a:srgbClr val="0B1D3A"/>
                 </a:solidFill>
                 <a:latin typeface="PingFang SC"/>
               </a:rPr>
@@ -7854,7 +8154,7 @@
       </p:sp>
       <p:sp>
         <p:nvSpPr>
-          <p:cNvPr id="51" name="TextBox 50"/>
+          <p:cNvPr id="58" name="TextBox 57"/>
           <p:cNvSpPr txBox="1"/>
           <p:nvPr/>
         </p:nvSpPr>
@@ -7893,7 +8193,7 @@
       </p:sp>
       <p:sp>
         <p:nvSpPr>
-          <p:cNvPr id="52" name="TextBox 51"/>
+          <p:cNvPr id="59" name="TextBox 58"/>
           <p:cNvSpPr txBox="1"/>
           <p:nvPr/>
         </p:nvSpPr>
@@ -13721,8 +14021,8 @@
         </p:blipFill>
         <p:spPr>
           <a:xfrm>
-            <a:off x="365760" y="762000"/>
-            <a:ext cx="11460480" cy="5144192"/>
+            <a:off x="1569720" y="762000"/>
+            <a:ext cx="9052560" cy="5760720"/>
           </a:xfrm>
           <a:prstGeom prst="rect">
             <a:avLst/>
@@ -16318,7 +16618,7 @@
                 </a:solidFill>
                 <a:latin typeface="PingFang SC"/>
               </a:rPr>
-              <a:t>路径/表名白名单|默认拒绝</a:t>
+              <a:t>路径/表名白名单</a:t>
             </a:r>
           </a:p>
         </p:txBody>
@@ -18556,7 +18856,7 @@
                 </a:solidFill>
                 <a:latin typeface="PingFang SC"/>
               </a:rPr>
-              <a:t>日志留存≥6 个月|面试高频:安全三件套</a:t>
+              <a:t>日志留存≥6 个月</a:t>
             </a:r>
           </a:p>
         </p:txBody>
@@ -19732,7 +20032,7 @@
                 </a:solidFill>
                 <a:latin typeface="PingFang SC"/>
               </a:rPr>
-              <a:t>5. 连接释放|断连自动重连,工具不摘除</a:t>
+              <a:t>5. 连接释放</a:t>
             </a:r>
           </a:p>
         </p:txBody>
@@ -20957,14 +21257,1376 @@
       </p:sp>
       <p:sp>
         <p:nvSpPr>
-          <p:cNvPr id="5" name="TextBox 4"/>
+          <p:cNvPr id="5" name="Rounded Rectangle 4"/>
+          <p:cNvSpPr/>
+          <p:nvPr/>
+        </p:nvSpPr>
+        <p:spPr>
+          <a:xfrm>
+            <a:off x="1847850" y="914400"/>
+            <a:ext cx="8877300" cy="1100137"/>
+          </a:xfrm>
+          <a:prstGeom prst="roundRect">
+            <a:avLst>
+              <a:gd name="adj" fmla="val 8000"/>
+            </a:avLst>
+          </a:prstGeom>
+          <a:solidFill>
+            <a:srgbClr val="F1F5F9"/>
+          </a:solidFill>
+          <a:ln>
+            <a:noFill/>
+          </a:ln>
+          <a:effectLst/>
+        </p:spPr>
+        <p:style>
+          <a:lnRef idx="1">
+            <a:schemeClr val="accent1"/>
+          </a:lnRef>
+          <a:fillRef idx="3">
+            <a:schemeClr val="accent1"/>
+          </a:fillRef>
+          <a:effectRef idx="2">
+            <a:schemeClr val="accent1"/>
+          </a:effectRef>
+          <a:fontRef idx="minor">
+            <a:schemeClr val="lt1"/>
+          </a:fontRef>
+        </p:style>
+        <p:txBody>
+          <a:bodyPr rtlCol="0" anchor="ctr"/>
+          <a:lstStyle/>
+          <a:p>
+            <a:pPr algn="ctr"/>
+          </a:p>
+        </p:txBody>
+      </p:sp>
+      <p:sp>
+        <p:nvSpPr>
+          <p:cNvPr id="6" name="TextBox 5"/>
           <p:cNvSpPr txBox="1"/>
           <p:nvPr/>
         </p:nvSpPr>
         <p:spPr>
           <a:xfrm>
-            <a:off x="9334500" y="0"/>
-            <a:ext cx="2667000" cy="704850"/>
+            <a:off x="1962150" y="685800"/>
+            <a:ext cx="1905000" cy="209550"/>
+          </a:xfrm>
+          <a:prstGeom prst="rect">
+            <a:avLst/>
+          </a:prstGeom>
+          <a:noFill/>
+        </p:spPr>
+        <p:txBody>
+          <a:bodyPr wrap="square" anchor="ctr">
+            <a:spAutoFit/>
+          </a:bodyPr>
+          <a:lstStyle/>
+          <a:p>
+            <a:pPr algn="l">
+              <a:lnSpc>
+                <a:spcPct val="100000"/>
+              </a:lnSpc>
+            </a:pPr>
+            <a:r>
+              <a:rPr sz="1100" b="1">
+                <a:solidFill>
+                  <a:srgbClr val="2563EB"/>
+                </a:solidFill>
+                <a:latin typeface="PingFang SC"/>
+              </a:rPr>
+              <a:t>L1</a:t>
+            </a:r>
+          </a:p>
+        </p:txBody>
+      </p:sp>
+      <p:sp>
+        <p:nvSpPr>
+          <p:cNvPr id="7" name="Rounded Rectangle 6"/>
+          <p:cNvSpPr/>
+          <p:nvPr/>
+        </p:nvSpPr>
+        <p:spPr>
+          <a:xfrm>
+            <a:off x="1905000" y="952500"/>
+            <a:ext cx="8763000" cy="1023937"/>
+          </a:xfrm>
+          <a:prstGeom prst="roundRect">
+            <a:avLst>
+              <a:gd name="adj" fmla="val 8000"/>
+            </a:avLst>
+          </a:prstGeom>
+          <a:solidFill>
+            <a:srgbClr val="FFFFFF"/>
+          </a:solidFill>
+          <a:ln w="12700">
+            <a:solidFill>
+              <a:srgbClr val="2563EB"/>
+            </a:solidFill>
+          </a:ln>
+          <a:effectLst/>
+        </p:spPr>
+        <p:style>
+          <a:lnRef idx="1">
+            <a:schemeClr val="accent1"/>
+          </a:lnRef>
+          <a:fillRef idx="3">
+            <a:schemeClr val="accent1"/>
+          </a:fillRef>
+          <a:effectRef idx="2">
+            <a:schemeClr val="accent1"/>
+          </a:effectRef>
+          <a:fontRef idx="minor">
+            <a:schemeClr val="lt1"/>
+          </a:fontRef>
+        </p:style>
+        <p:txBody>
+          <a:bodyPr rtlCol="0" anchor="ctr"/>
+          <a:lstStyle/>
+          <a:p>
+            <a:pPr algn="ctr"/>
+          </a:p>
+        </p:txBody>
+      </p:sp>
+      <p:sp>
+        <p:nvSpPr>
+          <p:cNvPr id="8" name="Rectangle 7"/>
+          <p:cNvSpPr/>
+          <p:nvPr/>
+        </p:nvSpPr>
+        <p:spPr>
+          <a:xfrm>
+            <a:off x="1905000" y="952500"/>
+            <a:ext cx="47625" cy="1023937"/>
+          </a:xfrm>
+          <a:prstGeom prst="rect">
+            <a:avLst/>
+          </a:prstGeom>
+          <a:solidFill>
+            <a:srgbClr val="2563EB"/>
+          </a:solidFill>
+          <a:ln>
+            <a:noFill/>
+          </a:ln>
+          <a:effectLst/>
+        </p:spPr>
+        <p:style>
+          <a:lnRef idx="1">
+            <a:schemeClr val="accent1"/>
+          </a:lnRef>
+          <a:fillRef idx="3">
+            <a:schemeClr val="accent1"/>
+          </a:fillRef>
+          <a:effectRef idx="2">
+            <a:schemeClr val="accent1"/>
+          </a:effectRef>
+          <a:fontRef idx="minor">
+            <a:schemeClr val="lt1"/>
+          </a:fontRef>
+        </p:style>
+        <p:txBody>
+          <a:bodyPr rtlCol="0" anchor="ctr"/>
+          <a:lstStyle/>
+          <a:p>
+            <a:pPr algn="ctr"/>
+          </a:p>
+        </p:txBody>
+      </p:sp>
+      <p:sp>
+        <p:nvSpPr>
+          <p:cNvPr id="9" name="TextBox 8"/>
+          <p:cNvSpPr txBox="1"/>
+          <p:nvPr/>
+        </p:nvSpPr>
+        <p:spPr>
+          <a:xfrm>
+            <a:off x="2057400" y="952500"/>
+            <a:ext cx="8496300" cy="1023937"/>
+          </a:xfrm>
+          <a:prstGeom prst="rect">
+            <a:avLst/>
+          </a:prstGeom>
+          <a:noFill/>
+        </p:spPr>
+        <p:txBody>
+          <a:bodyPr wrap="none" anchor="ctr">
+            <a:spAutoFit/>
+          </a:bodyPr>
+          <a:lstStyle/>
+          <a:p>
+            <a:pPr algn="l">
+              <a:lnSpc>
+                <a:spcPct val="115000"/>
+              </a:lnSpc>
+            </a:pPr>
+            <a:r>
+              <a:rPr sz="1100" b="1">
+                <a:solidFill>
+                  <a:srgbClr val="0B1D3A"/>
+                </a:solidFill>
+                <a:latin typeface="PingFang SC"/>
+              </a:rPr>
+              <a:t>Agent Loop:任务分解</a:t>
+            </a:r>
+          </a:p>
+        </p:txBody>
+      </p:sp>
+      <p:cxnSp>
+        <p:nvCxnSpPr>
+          <p:cNvPr id="10" name="Connector 9"/>
+          <p:cNvCxnSpPr/>
+          <p:nvPr/>
+        </p:nvCxnSpPr>
+        <p:spPr>
+          <a:xfrm>
+            <a:off x="6096000" y="2033587"/>
+            <a:ext cx="0" cy="152400"/>
+          </a:xfrm>
+          <a:prstGeom prst="line">
+            <a:avLst/>
+          </a:prstGeom>
+          <a:ln w="17780">
+            <a:solidFill>
+              <a:srgbClr val="475569"/>
+            </a:solidFill>
+          </a:ln>
+        </p:spPr>
+        <p:style>
+          <a:lnRef idx="2">
+            <a:schemeClr val="accent1"/>
+          </a:lnRef>
+          <a:fillRef idx="0">
+            <a:schemeClr val="accent1"/>
+          </a:fillRef>
+          <a:effectRef idx="1">
+            <a:schemeClr val="accent1"/>
+          </a:effectRef>
+          <a:fontRef idx="minor">
+            <a:schemeClr val="tx1"/>
+          </a:fontRef>
+        </p:style>
+      </p:cxnSp>
+      <p:sp>
+        <p:nvSpPr>
+          <p:cNvPr id="11" name="Isosceles Triangle 10"/>
+          <p:cNvSpPr/>
+          <p:nvPr/>
+        </p:nvSpPr>
+        <p:spPr>
+          <a:xfrm rot="10800000">
+            <a:off x="6053138" y="2100263"/>
+            <a:ext cx="85725" cy="85725"/>
+          </a:xfrm>
+          <a:prstGeom prst="triangle">
+            <a:avLst/>
+          </a:prstGeom>
+          <a:solidFill>
+            <a:srgbClr val="475569"/>
+          </a:solidFill>
+          <a:ln>
+            <a:noFill/>
+          </a:ln>
+          <a:effectLst/>
+        </p:spPr>
+        <p:style>
+          <a:lnRef idx="1">
+            <a:schemeClr val="accent1"/>
+          </a:lnRef>
+          <a:fillRef idx="3">
+            <a:schemeClr val="accent1"/>
+          </a:fillRef>
+          <a:effectRef idx="2">
+            <a:schemeClr val="accent1"/>
+          </a:effectRef>
+          <a:fontRef idx="minor">
+            <a:schemeClr val="lt1"/>
+          </a:fontRef>
+        </p:style>
+        <p:txBody>
+          <a:bodyPr rtlCol="0" anchor="ctr"/>
+          <a:lstStyle/>
+          <a:p>
+            <a:pPr algn="ctr"/>
+          </a:p>
+        </p:txBody>
+      </p:sp>
+      <p:sp>
+        <p:nvSpPr>
+          <p:cNvPr id="12" name="Rounded Rectangle 11"/>
+          <p:cNvSpPr/>
+          <p:nvPr/>
+        </p:nvSpPr>
+        <p:spPr>
+          <a:xfrm>
+            <a:off x="5838825" y="2014537"/>
+            <a:ext cx="514350" cy="171450"/>
+          </a:xfrm>
+          <a:prstGeom prst="roundRect">
+            <a:avLst>
+              <a:gd name="adj" fmla="val 8000"/>
+            </a:avLst>
+          </a:prstGeom>
+          <a:solidFill>
+            <a:srgbClr val="FFFFFF"/>
+          </a:solidFill>
+          <a:ln w="12700">
+            <a:solidFill>
+              <a:srgbClr val="DDE5EE"/>
+            </a:solidFill>
+          </a:ln>
+          <a:effectLst/>
+        </p:spPr>
+        <p:style>
+          <a:lnRef idx="1">
+            <a:schemeClr val="accent1"/>
+          </a:lnRef>
+          <a:fillRef idx="3">
+            <a:schemeClr val="accent1"/>
+          </a:fillRef>
+          <a:effectRef idx="2">
+            <a:schemeClr val="accent1"/>
+          </a:effectRef>
+          <a:fontRef idx="minor">
+            <a:schemeClr val="lt1"/>
+          </a:fontRef>
+        </p:style>
+        <p:txBody>
+          <a:bodyPr rtlCol="0" anchor="ctr"/>
+          <a:lstStyle/>
+          <a:p>
+            <a:pPr algn="ctr"/>
+          </a:p>
+        </p:txBody>
+      </p:sp>
+      <p:sp>
+        <p:nvSpPr>
+          <p:cNvPr id="13" name="TextBox 12"/>
+          <p:cNvSpPr txBox="1"/>
+          <p:nvPr/>
+        </p:nvSpPr>
+        <p:spPr>
+          <a:xfrm>
+            <a:off x="5838825" y="2014537"/>
+            <a:ext cx="514350" cy="171450"/>
+          </a:xfrm>
+          <a:prstGeom prst="rect">
+            <a:avLst/>
+          </a:prstGeom>
+          <a:noFill/>
+        </p:spPr>
+        <p:txBody>
+          <a:bodyPr wrap="square" anchor="ctr">
+            <a:spAutoFit/>
+          </a:bodyPr>
+          <a:lstStyle/>
+          <a:p>
+            <a:pPr algn="ctr">
+              <a:lnSpc>
+                <a:spcPct val="100000"/>
+              </a:lnSpc>
+            </a:pPr>
+            <a:r>
+              <a:rPr sz="1100" b="1">
+                <a:solidFill>
+                  <a:srgbClr val="0B1D3A"/>
+                </a:solidFill>
+                <a:latin typeface="PingFang SC"/>
+              </a:rPr>
+              <a:t>读</a:t>
+            </a:r>
+          </a:p>
+        </p:txBody>
+      </p:sp>
+      <p:sp>
+        <p:nvSpPr>
+          <p:cNvPr id="14" name="Rounded Rectangle 13"/>
+          <p:cNvSpPr/>
+          <p:nvPr/>
+        </p:nvSpPr>
+        <p:spPr>
+          <a:xfrm>
+            <a:off x="1847850" y="2185987"/>
+            <a:ext cx="8877300" cy="1100137"/>
+          </a:xfrm>
+          <a:prstGeom prst="roundRect">
+            <a:avLst>
+              <a:gd name="adj" fmla="val 8000"/>
+            </a:avLst>
+          </a:prstGeom>
+          <a:solidFill>
+            <a:srgbClr val="F1F5F9"/>
+          </a:solidFill>
+          <a:ln>
+            <a:noFill/>
+          </a:ln>
+          <a:effectLst/>
+        </p:spPr>
+        <p:style>
+          <a:lnRef idx="1">
+            <a:schemeClr val="accent1"/>
+          </a:lnRef>
+          <a:fillRef idx="3">
+            <a:schemeClr val="accent1"/>
+          </a:fillRef>
+          <a:effectRef idx="2">
+            <a:schemeClr val="accent1"/>
+          </a:effectRef>
+          <a:fontRef idx="minor">
+            <a:schemeClr val="lt1"/>
+          </a:fontRef>
+        </p:style>
+        <p:txBody>
+          <a:bodyPr rtlCol="0" anchor="ctr"/>
+          <a:lstStyle/>
+          <a:p>
+            <a:pPr algn="ctr"/>
+          </a:p>
+        </p:txBody>
+      </p:sp>
+      <p:sp>
+        <p:nvSpPr>
+          <p:cNvPr id="15" name="TextBox 14"/>
+          <p:cNvSpPr txBox="1"/>
+          <p:nvPr/>
+        </p:nvSpPr>
+        <p:spPr>
+          <a:xfrm>
+            <a:off x="1962150" y="1957387"/>
+            <a:ext cx="1905000" cy="209550"/>
+          </a:xfrm>
+          <a:prstGeom prst="rect">
+            <a:avLst/>
+          </a:prstGeom>
+          <a:noFill/>
+        </p:spPr>
+        <p:txBody>
+          <a:bodyPr wrap="square" anchor="ctr">
+            <a:spAutoFit/>
+          </a:bodyPr>
+          <a:lstStyle/>
+          <a:p>
+            <a:pPr algn="l">
+              <a:lnSpc>
+                <a:spcPct val="100000"/>
+              </a:lnSpc>
+            </a:pPr>
+            <a:r>
+              <a:rPr sz="1100" b="1">
+                <a:solidFill>
+                  <a:srgbClr val="14B8A6"/>
+                </a:solidFill>
+                <a:latin typeface="PingFang SC"/>
+              </a:rPr>
+              <a:t>L2</a:t>
+            </a:r>
+          </a:p>
+        </p:txBody>
+      </p:sp>
+      <p:sp>
+        <p:nvSpPr>
+          <p:cNvPr id="16" name="Rounded Rectangle 15"/>
+          <p:cNvSpPr/>
+          <p:nvPr/>
+        </p:nvSpPr>
+        <p:spPr>
+          <a:xfrm>
+            <a:off x="1905000" y="2224087"/>
+            <a:ext cx="8763000" cy="1023937"/>
+          </a:xfrm>
+          <a:prstGeom prst="roundRect">
+            <a:avLst>
+              <a:gd name="adj" fmla="val 8000"/>
+            </a:avLst>
+          </a:prstGeom>
+          <a:solidFill>
+            <a:srgbClr val="FFFFFF"/>
+          </a:solidFill>
+          <a:ln w="12700">
+            <a:solidFill>
+              <a:srgbClr val="14B8A6"/>
+            </a:solidFill>
+          </a:ln>
+          <a:effectLst/>
+        </p:spPr>
+        <p:style>
+          <a:lnRef idx="1">
+            <a:schemeClr val="accent1"/>
+          </a:lnRef>
+          <a:fillRef idx="3">
+            <a:schemeClr val="accent1"/>
+          </a:fillRef>
+          <a:effectRef idx="2">
+            <a:schemeClr val="accent1"/>
+          </a:effectRef>
+          <a:fontRef idx="minor">
+            <a:schemeClr val="lt1"/>
+          </a:fontRef>
+        </p:style>
+        <p:txBody>
+          <a:bodyPr rtlCol="0" anchor="ctr"/>
+          <a:lstStyle/>
+          <a:p>
+            <a:pPr algn="ctr"/>
+          </a:p>
+        </p:txBody>
+      </p:sp>
+      <p:sp>
+        <p:nvSpPr>
+          <p:cNvPr id="17" name="Rectangle 16"/>
+          <p:cNvSpPr/>
+          <p:nvPr/>
+        </p:nvSpPr>
+        <p:spPr>
+          <a:xfrm>
+            <a:off x="1905000" y="2224087"/>
+            <a:ext cx="47625" cy="1023937"/>
+          </a:xfrm>
+          <a:prstGeom prst="rect">
+            <a:avLst/>
+          </a:prstGeom>
+          <a:solidFill>
+            <a:srgbClr val="14B8A6"/>
+          </a:solidFill>
+          <a:ln>
+            <a:noFill/>
+          </a:ln>
+          <a:effectLst/>
+        </p:spPr>
+        <p:style>
+          <a:lnRef idx="1">
+            <a:schemeClr val="accent1"/>
+          </a:lnRef>
+          <a:fillRef idx="3">
+            <a:schemeClr val="accent1"/>
+          </a:fillRef>
+          <a:effectRef idx="2">
+            <a:schemeClr val="accent1"/>
+          </a:effectRef>
+          <a:fontRef idx="minor">
+            <a:schemeClr val="lt1"/>
+          </a:fontRef>
+        </p:style>
+        <p:txBody>
+          <a:bodyPr rtlCol="0" anchor="ctr"/>
+          <a:lstStyle/>
+          <a:p>
+            <a:pPr algn="ctr"/>
+          </a:p>
+        </p:txBody>
+      </p:sp>
+      <p:sp>
+        <p:nvSpPr>
+          <p:cNvPr id="18" name="TextBox 17"/>
+          <p:cNvSpPr txBox="1"/>
+          <p:nvPr/>
+        </p:nvSpPr>
+        <p:spPr>
+          <a:xfrm>
+            <a:off x="2057400" y="2224087"/>
+            <a:ext cx="8496300" cy="1023937"/>
+          </a:xfrm>
+          <a:prstGeom prst="rect">
+            <a:avLst/>
+          </a:prstGeom>
+          <a:noFill/>
+        </p:spPr>
+        <p:txBody>
+          <a:bodyPr wrap="none" anchor="ctr">
+            <a:spAutoFit/>
+          </a:bodyPr>
+          <a:lstStyle/>
+          <a:p>
+            <a:pPr algn="l">
+              <a:lnSpc>
+                <a:spcPct val="115000"/>
+              </a:lnSpc>
+            </a:pPr>
+            <a:r>
+              <a:rPr sz="900" b="1">
+                <a:solidFill>
+                  <a:srgbClr val="0B1D3A"/>
+                </a:solidFill>
+                <a:latin typeface="PingFang SC"/>
+              </a:rPr>
+              <a:t>文件 Server:读需求(路径白名单)</a:t>
+            </a:r>
+          </a:p>
+        </p:txBody>
+      </p:sp>
+      <p:cxnSp>
+        <p:nvCxnSpPr>
+          <p:cNvPr id="19" name="Connector 18"/>
+          <p:cNvCxnSpPr/>
+          <p:nvPr/>
+        </p:nvCxnSpPr>
+        <p:spPr>
+          <a:xfrm>
+            <a:off x="6096000" y="3305174"/>
+            <a:ext cx="0" cy="152400"/>
+          </a:xfrm>
+          <a:prstGeom prst="line">
+            <a:avLst/>
+          </a:prstGeom>
+          <a:ln w="17780">
+            <a:solidFill>
+              <a:srgbClr val="475569"/>
+            </a:solidFill>
+          </a:ln>
+        </p:spPr>
+        <p:style>
+          <a:lnRef idx="2">
+            <a:schemeClr val="accent1"/>
+          </a:lnRef>
+          <a:fillRef idx="0">
+            <a:schemeClr val="accent1"/>
+          </a:fillRef>
+          <a:effectRef idx="1">
+            <a:schemeClr val="accent1"/>
+          </a:effectRef>
+          <a:fontRef idx="minor">
+            <a:schemeClr val="tx1"/>
+          </a:fontRef>
+        </p:style>
+      </p:cxnSp>
+      <p:sp>
+        <p:nvSpPr>
+          <p:cNvPr id="20" name="Isosceles Triangle 19"/>
+          <p:cNvSpPr/>
+          <p:nvPr/>
+        </p:nvSpPr>
+        <p:spPr>
+          <a:xfrm rot="10800000">
+            <a:off x="6053138" y="3371850"/>
+            <a:ext cx="85725" cy="85725"/>
+          </a:xfrm>
+          <a:prstGeom prst="triangle">
+            <a:avLst/>
+          </a:prstGeom>
+          <a:solidFill>
+            <a:srgbClr val="475569"/>
+          </a:solidFill>
+          <a:ln>
+            <a:noFill/>
+          </a:ln>
+          <a:effectLst/>
+        </p:spPr>
+        <p:style>
+          <a:lnRef idx="1">
+            <a:schemeClr val="accent1"/>
+          </a:lnRef>
+          <a:fillRef idx="3">
+            <a:schemeClr val="accent1"/>
+          </a:fillRef>
+          <a:effectRef idx="2">
+            <a:schemeClr val="accent1"/>
+          </a:effectRef>
+          <a:fontRef idx="minor">
+            <a:schemeClr val="lt1"/>
+          </a:fontRef>
+        </p:style>
+        <p:txBody>
+          <a:bodyPr rtlCol="0" anchor="ctr"/>
+          <a:lstStyle/>
+          <a:p>
+            <a:pPr algn="ctr"/>
+          </a:p>
+        </p:txBody>
+      </p:sp>
+      <p:sp>
+        <p:nvSpPr>
+          <p:cNvPr id="21" name="Rounded Rectangle 20"/>
+          <p:cNvSpPr/>
+          <p:nvPr/>
+        </p:nvSpPr>
+        <p:spPr>
+          <a:xfrm>
+            <a:off x="5838825" y="3286124"/>
+            <a:ext cx="514350" cy="171450"/>
+          </a:xfrm>
+          <a:prstGeom prst="roundRect">
+            <a:avLst>
+              <a:gd name="adj" fmla="val 8000"/>
+            </a:avLst>
+          </a:prstGeom>
+          <a:solidFill>
+            <a:srgbClr val="FFFFFF"/>
+          </a:solidFill>
+          <a:ln w="12700">
+            <a:solidFill>
+              <a:srgbClr val="DDE5EE"/>
+            </a:solidFill>
+          </a:ln>
+          <a:effectLst/>
+        </p:spPr>
+        <p:style>
+          <a:lnRef idx="1">
+            <a:schemeClr val="accent1"/>
+          </a:lnRef>
+          <a:fillRef idx="3">
+            <a:schemeClr val="accent1"/>
+          </a:fillRef>
+          <a:effectRef idx="2">
+            <a:schemeClr val="accent1"/>
+          </a:effectRef>
+          <a:fontRef idx="minor">
+            <a:schemeClr val="lt1"/>
+          </a:fontRef>
+        </p:style>
+        <p:txBody>
+          <a:bodyPr rtlCol="0" anchor="ctr"/>
+          <a:lstStyle/>
+          <a:p>
+            <a:pPr algn="ctr"/>
+          </a:p>
+        </p:txBody>
+      </p:sp>
+      <p:sp>
+        <p:nvSpPr>
+          <p:cNvPr id="22" name="TextBox 21"/>
+          <p:cNvSpPr txBox="1"/>
+          <p:nvPr/>
+        </p:nvSpPr>
+        <p:spPr>
+          <a:xfrm>
+            <a:off x="5838825" y="3286124"/>
+            <a:ext cx="514350" cy="171450"/>
+          </a:xfrm>
+          <a:prstGeom prst="rect">
+            <a:avLst/>
+          </a:prstGeom>
+          <a:noFill/>
+        </p:spPr>
+        <p:txBody>
+          <a:bodyPr wrap="square" anchor="ctr">
+            <a:spAutoFit/>
+          </a:bodyPr>
+          <a:lstStyle/>
+          <a:p>
+            <a:pPr algn="ctr">
+              <a:lnSpc>
+                <a:spcPct val="100000"/>
+              </a:lnSpc>
+            </a:pPr>
+            <a:r>
+              <a:rPr sz="1100" b="1">
+                <a:solidFill>
+                  <a:srgbClr val="0B1D3A"/>
+                </a:solidFill>
+                <a:latin typeface="PingFang SC"/>
+              </a:rPr>
+              <a:t>查</a:t>
+            </a:r>
+          </a:p>
+        </p:txBody>
+      </p:sp>
+      <p:sp>
+        <p:nvSpPr>
+          <p:cNvPr id="23" name="Rounded Rectangle 22"/>
+          <p:cNvSpPr/>
+          <p:nvPr/>
+        </p:nvSpPr>
+        <p:spPr>
+          <a:xfrm>
+            <a:off x="1847850" y="3457574"/>
+            <a:ext cx="8877300" cy="1100137"/>
+          </a:xfrm>
+          <a:prstGeom prst="roundRect">
+            <a:avLst>
+              <a:gd name="adj" fmla="val 8000"/>
+            </a:avLst>
+          </a:prstGeom>
+          <a:solidFill>
+            <a:srgbClr val="F1F5F9"/>
+          </a:solidFill>
+          <a:ln>
+            <a:noFill/>
+          </a:ln>
+          <a:effectLst/>
+        </p:spPr>
+        <p:style>
+          <a:lnRef idx="1">
+            <a:schemeClr val="accent1"/>
+          </a:lnRef>
+          <a:fillRef idx="3">
+            <a:schemeClr val="accent1"/>
+          </a:fillRef>
+          <a:effectRef idx="2">
+            <a:schemeClr val="accent1"/>
+          </a:effectRef>
+          <a:fontRef idx="minor">
+            <a:schemeClr val="lt1"/>
+          </a:fontRef>
+        </p:style>
+        <p:txBody>
+          <a:bodyPr rtlCol="0" anchor="ctr"/>
+          <a:lstStyle/>
+          <a:p>
+            <a:pPr algn="ctr"/>
+          </a:p>
+        </p:txBody>
+      </p:sp>
+      <p:sp>
+        <p:nvSpPr>
+          <p:cNvPr id="24" name="TextBox 23"/>
+          <p:cNvSpPr txBox="1"/>
+          <p:nvPr/>
+        </p:nvSpPr>
+        <p:spPr>
+          <a:xfrm>
+            <a:off x="1962150" y="3228974"/>
+            <a:ext cx="1905000" cy="209550"/>
+          </a:xfrm>
+          <a:prstGeom prst="rect">
+            <a:avLst/>
+          </a:prstGeom>
+          <a:noFill/>
+        </p:spPr>
+        <p:txBody>
+          <a:bodyPr wrap="square" anchor="ctr">
+            <a:spAutoFit/>
+          </a:bodyPr>
+          <a:lstStyle/>
+          <a:p>
+            <a:pPr algn="l">
+              <a:lnSpc>
+                <a:spcPct val="100000"/>
+              </a:lnSpc>
+            </a:pPr>
+            <a:r>
+              <a:rPr sz="1100" b="1">
+                <a:solidFill>
+                  <a:srgbClr val="8B5CF6"/>
+                </a:solidFill>
+                <a:latin typeface="PingFang SC"/>
+              </a:rPr>
+              <a:t>L3</a:t>
+            </a:r>
+          </a:p>
+        </p:txBody>
+      </p:sp>
+      <p:sp>
+        <p:nvSpPr>
+          <p:cNvPr id="25" name="Rounded Rectangle 24"/>
+          <p:cNvSpPr/>
+          <p:nvPr/>
+        </p:nvSpPr>
+        <p:spPr>
+          <a:xfrm>
+            <a:off x="1905000" y="3495674"/>
+            <a:ext cx="8763000" cy="1023937"/>
+          </a:xfrm>
+          <a:prstGeom prst="roundRect">
+            <a:avLst>
+              <a:gd name="adj" fmla="val 8000"/>
+            </a:avLst>
+          </a:prstGeom>
+          <a:solidFill>
+            <a:srgbClr val="FFFFFF"/>
+          </a:solidFill>
+          <a:ln w="12700">
+            <a:solidFill>
+              <a:srgbClr val="8B5CF6"/>
+            </a:solidFill>
+          </a:ln>
+          <a:effectLst/>
+        </p:spPr>
+        <p:style>
+          <a:lnRef idx="1">
+            <a:schemeClr val="accent1"/>
+          </a:lnRef>
+          <a:fillRef idx="3">
+            <a:schemeClr val="accent1"/>
+          </a:fillRef>
+          <a:effectRef idx="2">
+            <a:schemeClr val="accent1"/>
+          </a:effectRef>
+          <a:fontRef idx="minor">
+            <a:schemeClr val="lt1"/>
+          </a:fontRef>
+        </p:style>
+        <p:txBody>
+          <a:bodyPr rtlCol="0" anchor="ctr"/>
+          <a:lstStyle/>
+          <a:p>
+            <a:pPr algn="ctr"/>
+          </a:p>
+        </p:txBody>
+      </p:sp>
+      <p:sp>
+        <p:nvSpPr>
+          <p:cNvPr id="26" name="Rectangle 25"/>
+          <p:cNvSpPr/>
+          <p:nvPr/>
+        </p:nvSpPr>
+        <p:spPr>
+          <a:xfrm>
+            <a:off x="1905000" y="3495674"/>
+            <a:ext cx="47625" cy="1023937"/>
+          </a:xfrm>
+          <a:prstGeom prst="rect">
+            <a:avLst/>
+          </a:prstGeom>
+          <a:solidFill>
+            <a:srgbClr val="8B5CF6"/>
+          </a:solidFill>
+          <a:ln>
+            <a:noFill/>
+          </a:ln>
+          <a:effectLst/>
+        </p:spPr>
+        <p:style>
+          <a:lnRef idx="1">
+            <a:schemeClr val="accent1"/>
+          </a:lnRef>
+          <a:fillRef idx="3">
+            <a:schemeClr val="accent1"/>
+          </a:fillRef>
+          <a:effectRef idx="2">
+            <a:schemeClr val="accent1"/>
+          </a:effectRef>
+          <a:fontRef idx="minor">
+            <a:schemeClr val="lt1"/>
+          </a:fontRef>
+        </p:style>
+        <p:txBody>
+          <a:bodyPr rtlCol="0" anchor="ctr"/>
+          <a:lstStyle/>
+          <a:p>
+            <a:pPr algn="ctr"/>
+          </a:p>
+        </p:txBody>
+      </p:sp>
+      <p:sp>
+        <p:nvSpPr>
+          <p:cNvPr id="27" name="TextBox 26"/>
+          <p:cNvSpPr txBox="1"/>
+          <p:nvPr/>
+        </p:nvSpPr>
+        <p:spPr>
+          <a:xfrm>
+            <a:off x="2057400" y="3495674"/>
+            <a:ext cx="8496300" cy="1023937"/>
+          </a:xfrm>
+          <a:prstGeom prst="rect">
+            <a:avLst/>
+          </a:prstGeom>
+          <a:noFill/>
+        </p:spPr>
+        <p:txBody>
+          <a:bodyPr wrap="none" anchor="ctr">
+            <a:spAutoFit/>
+          </a:bodyPr>
+          <a:lstStyle/>
+          <a:p>
+            <a:pPr algn="l">
+              <a:lnSpc>
+                <a:spcPct val="115000"/>
+              </a:lnSpc>
+            </a:pPr>
+            <a:r>
+              <a:rPr sz="1100" b="1">
+                <a:solidFill>
+                  <a:srgbClr val="0B1D3A"/>
+                </a:solidFill>
+                <a:latin typeface="PingFang SC"/>
+              </a:rPr>
+              <a:t>DB Server:查数据(只读)</a:t>
+            </a:r>
+          </a:p>
+        </p:txBody>
+      </p:sp>
+      <p:cxnSp>
+        <p:nvCxnSpPr>
+          <p:cNvPr id="28" name="Connector 27"/>
+          <p:cNvCxnSpPr/>
+          <p:nvPr/>
+        </p:nvCxnSpPr>
+        <p:spPr>
+          <a:xfrm>
+            <a:off x="6096000" y="4576761"/>
+            <a:ext cx="0" cy="152400"/>
+          </a:xfrm>
+          <a:prstGeom prst="line">
+            <a:avLst/>
+          </a:prstGeom>
+          <a:ln w="17780">
+            <a:solidFill>
+              <a:srgbClr val="475569"/>
+            </a:solidFill>
+          </a:ln>
+        </p:spPr>
+        <p:style>
+          <a:lnRef idx="2">
+            <a:schemeClr val="accent1"/>
+          </a:lnRef>
+          <a:fillRef idx="0">
+            <a:schemeClr val="accent1"/>
+          </a:fillRef>
+          <a:effectRef idx="1">
+            <a:schemeClr val="accent1"/>
+          </a:effectRef>
+          <a:fontRef idx="minor">
+            <a:schemeClr val="tx1"/>
+          </a:fontRef>
+        </p:style>
+      </p:cxnSp>
+      <p:sp>
+        <p:nvSpPr>
+          <p:cNvPr id="29" name="Isosceles Triangle 28"/>
+          <p:cNvSpPr/>
+          <p:nvPr/>
+        </p:nvSpPr>
+        <p:spPr>
+          <a:xfrm rot="10800000">
+            <a:off x="6053138" y="4643437"/>
+            <a:ext cx="85725" cy="85725"/>
+          </a:xfrm>
+          <a:prstGeom prst="triangle">
+            <a:avLst/>
+          </a:prstGeom>
+          <a:solidFill>
+            <a:srgbClr val="475569"/>
+          </a:solidFill>
+          <a:ln>
+            <a:noFill/>
+          </a:ln>
+          <a:effectLst/>
+        </p:spPr>
+        <p:style>
+          <a:lnRef idx="1">
+            <a:schemeClr val="accent1"/>
+          </a:lnRef>
+          <a:fillRef idx="3">
+            <a:schemeClr val="accent1"/>
+          </a:fillRef>
+          <a:effectRef idx="2">
+            <a:schemeClr val="accent1"/>
+          </a:effectRef>
+          <a:fontRef idx="minor">
+            <a:schemeClr val="lt1"/>
+          </a:fontRef>
+        </p:style>
+        <p:txBody>
+          <a:bodyPr rtlCol="0" anchor="ctr"/>
+          <a:lstStyle/>
+          <a:p>
+            <a:pPr algn="ctr"/>
+          </a:p>
+        </p:txBody>
+      </p:sp>
+      <p:sp>
+        <p:nvSpPr>
+          <p:cNvPr id="30" name="Rounded Rectangle 29"/>
+          <p:cNvSpPr/>
+          <p:nvPr/>
+        </p:nvSpPr>
+        <p:spPr>
+          <a:xfrm>
+            <a:off x="5743575" y="4557711"/>
+            <a:ext cx="704850" cy="171450"/>
+          </a:xfrm>
+          <a:prstGeom prst="roundRect">
+            <a:avLst>
+              <a:gd name="adj" fmla="val 8000"/>
+            </a:avLst>
+          </a:prstGeom>
+          <a:solidFill>
+            <a:srgbClr val="FFFFFF"/>
+          </a:solidFill>
+          <a:ln w="12700">
+            <a:solidFill>
+              <a:srgbClr val="DDE5EE"/>
+            </a:solidFill>
+          </a:ln>
+          <a:effectLst/>
+        </p:spPr>
+        <p:style>
+          <a:lnRef idx="1">
+            <a:schemeClr val="accent1"/>
+          </a:lnRef>
+          <a:fillRef idx="3">
+            <a:schemeClr val="accent1"/>
+          </a:fillRef>
+          <a:effectRef idx="2">
+            <a:schemeClr val="accent1"/>
+          </a:effectRef>
+          <a:fontRef idx="minor">
+            <a:schemeClr val="lt1"/>
+          </a:fontRef>
+        </p:style>
+        <p:txBody>
+          <a:bodyPr rtlCol="0" anchor="ctr"/>
+          <a:lstStyle/>
+          <a:p>
+            <a:pPr algn="ctr"/>
+          </a:p>
+        </p:txBody>
+      </p:sp>
+      <p:sp>
+        <p:nvSpPr>
+          <p:cNvPr id="31" name="TextBox 30"/>
+          <p:cNvSpPr txBox="1"/>
+          <p:nvPr/>
+        </p:nvSpPr>
+        <p:spPr>
+          <a:xfrm>
+            <a:off x="5743575" y="4557711"/>
+            <a:ext cx="704850" cy="171450"/>
+          </a:xfrm>
+          <a:prstGeom prst="rect">
+            <a:avLst/>
+          </a:prstGeom>
+          <a:noFill/>
+        </p:spPr>
+        <p:txBody>
+          <a:bodyPr wrap="square" anchor="ctr">
+            <a:spAutoFit/>
+          </a:bodyPr>
+          <a:lstStyle/>
+          <a:p>
+            <a:pPr algn="ctr">
+              <a:lnSpc>
+                <a:spcPct val="100000"/>
+              </a:lnSpc>
+            </a:pPr>
+            <a:r>
+              <a:rPr sz="1100" b="1">
+                <a:solidFill>
+                  <a:srgbClr val="0B1D3A"/>
+                </a:solidFill>
+                <a:latin typeface="PingFang SC"/>
+              </a:rPr>
+              <a:t>交付</a:t>
+            </a:r>
+          </a:p>
+        </p:txBody>
+      </p:sp>
+      <p:sp>
+        <p:nvSpPr>
+          <p:cNvPr id="32" name="Rounded Rectangle 31"/>
+          <p:cNvSpPr/>
+          <p:nvPr/>
+        </p:nvSpPr>
+        <p:spPr>
+          <a:xfrm>
+            <a:off x="1847850" y="4729161"/>
+            <a:ext cx="8877300" cy="1100137"/>
+          </a:xfrm>
+          <a:prstGeom prst="roundRect">
+            <a:avLst>
+              <a:gd name="adj" fmla="val 8000"/>
+            </a:avLst>
+          </a:prstGeom>
+          <a:solidFill>
+            <a:srgbClr val="F1F5F9"/>
+          </a:solidFill>
+          <a:ln>
+            <a:noFill/>
+          </a:ln>
+          <a:effectLst/>
+        </p:spPr>
+        <p:style>
+          <a:lnRef idx="1">
+            <a:schemeClr val="accent1"/>
+          </a:lnRef>
+          <a:fillRef idx="3">
+            <a:schemeClr val="accent1"/>
+          </a:fillRef>
+          <a:effectRef idx="2">
+            <a:schemeClr val="accent1"/>
+          </a:effectRef>
+          <a:fontRef idx="minor">
+            <a:schemeClr val="lt1"/>
+          </a:fontRef>
+        </p:style>
+        <p:txBody>
+          <a:bodyPr rtlCol="0" anchor="ctr"/>
+          <a:lstStyle/>
+          <a:p>
+            <a:pPr algn="ctr"/>
+          </a:p>
+        </p:txBody>
+      </p:sp>
+      <p:sp>
+        <p:nvSpPr>
+          <p:cNvPr id="33" name="TextBox 32"/>
+          <p:cNvSpPr txBox="1"/>
+          <p:nvPr/>
+        </p:nvSpPr>
+        <p:spPr>
+          <a:xfrm>
+            <a:off x="1962150" y="4500561"/>
+            <a:ext cx="1905000" cy="209550"/>
+          </a:xfrm>
+          <a:prstGeom prst="rect">
+            <a:avLst/>
+          </a:prstGeom>
+          <a:noFill/>
+        </p:spPr>
+        <p:txBody>
+          <a:bodyPr wrap="square" anchor="ctr">
+            <a:spAutoFit/>
+          </a:bodyPr>
+          <a:lstStyle/>
+          <a:p>
+            <a:pPr algn="l">
+              <a:lnSpc>
+                <a:spcPct val="100000"/>
+              </a:lnSpc>
+            </a:pPr>
+            <a:r>
+              <a:rPr sz="1100" b="1">
+                <a:solidFill>
+                  <a:srgbClr val="F59E0B"/>
+                </a:solidFill>
+                <a:latin typeface="PingFang SC"/>
+              </a:rPr>
+              <a:t>L4</a:t>
+            </a:r>
+          </a:p>
+        </p:txBody>
+      </p:sp>
+      <p:sp>
+        <p:nvSpPr>
+          <p:cNvPr id="34" name="Rounded Rectangle 33"/>
+          <p:cNvSpPr/>
+          <p:nvPr/>
+        </p:nvSpPr>
+        <p:spPr>
+          <a:xfrm>
+            <a:off x="1905000" y="4767261"/>
+            <a:ext cx="8763000" cy="1023937"/>
+          </a:xfrm>
+          <a:prstGeom prst="roundRect">
+            <a:avLst>
+              <a:gd name="adj" fmla="val 8000"/>
+            </a:avLst>
+          </a:prstGeom>
+          <a:solidFill>
+            <a:srgbClr val="FFFFFF"/>
+          </a:solidFill>
+          <a:ln w="12700">
+            <a:solidFill>
+              <a:srgbClr val="F59E0B"/>
+            </a:solidFill>
+          </a:ln>
+          <a:effectLst/>
+        </p:spPr>
+        <p:style>
+          <a:lnRef idx="1">
+            <a:schemeClr val="accent1"/>
+          </a:lnRef>
+          <a:fillRef idx="3">
+            <a:schemeClr val="accent1"/>
+          </a:fillRef>
+          <a:effectRef idx="2">
+            <a:schemeClr val="accent1"/>
+          </a:effectRef>
+          <a:fontRef idx="minor">
+            <a:schemeClr val="lt1"/>
+          </a:fontRef>
+        </p:style>
+        <p:txBody>
+          <a:bodyPr rtlCol="0" anchor="ctr"/>
+          <a:lstStyle/>
+          <a:p>
+            <a:pPr algn="ctr"/>
+          </a:p>
+        </p:txBody>
+      </p:sp>
+      <p:sp>
+        <p:nvSpPr>
+          <p:cNvPr id="35" name="Rectangle 34"/>
+          <p:cNvSpPr/>
+          <p:nvPr/>
+        </p:nvSpPr>
+        <p:spPr>
+          <a:xfrm>
+            <a:off x="1905000" y="4767261"/>
+            <a:ext cx="47625" cy="1023937"/>
+          </a:xfrm>
+          <a:prstGeom prst="rect">
+            <a:avLst/>
+          </a:prstGeom>
+          <a:solidFill>
+            <a:srgbClr val="F59E0B"/>
+          </a:solidFill>
+          <a:ln>
+            <a:noFill/>
+          </a:ln>
+          <a:effectLst/>
+        </p:spPr>
+        <p:style>
+          <a:lnRef idx="1">
+            <a:schemeClr val="accent1"/>
+          </a:lnRef>
+          <a:fillRef idx="3">
+            <a:schemeClr val="accent1"/>
+          </a:fillRef>
+          <a:effectRef idx="2">
+            <a:schemeClr val="accent1"/>
+          </a:effectRef>
+          <a:fontRef idx="minor">
+            <a:schemeClr val="lt1"/>
+          </a:fontRef>
+        </p:style>
+        <p:txBody>
+          <a:bodyPr rtlCol="0" anchor="ctr"/>
+          <a:lstStyle/>
+          <a:p>
+            <a:pPr algn="ctr"/>
+          </a:p>
+        </p:txBody>
+      </p:sp>
+      <p:sp>
+        <p:nvSpPr>
+          <p:cNvPr id="36" name="TextBox 35"/>
+          <p:cNvSpPr txBox="1"/>
+          <p:nvPr/>
+        </p:nvSpPr>
+        <p:spPr>
+          <a:xfrm>
+            <a:off x="2057400" y="4767261"/>
+            <a:ext cx="8496300" cy="1023937"/>
+          </a:xfrm>
+          <a:prstGeom prst="rect">
+            <a:avLst/>
+          </a:prstGeom>
+          <a:noFill/>
+        </p:spPr>
+        <p:txBody>
+          <a:bodyPr wrap="none" anchor="ctr">
+            <a:spAutoFit/>
+          </a:bodyPr>
+          <a:lstStyle/>
+          <a:p>
+            <a:pPr algn="l">
+              <a:lnSpc>
+                <a:spcPct val="115000"/>
+              </a:lnSpc>
+            </a:pPr>
+            <a:r>
+              <a:rPr sz="900" b="1">
+                <a:solidFill>
+                  <a:srgbClr val="0B1D3A"/>
+                </a:solidFill>
+                <a:latin typeface="PingFang SC"/>
+              </a:rPr>
+              <a:t>GitHub Server:提 PR(Token 最小权)</a:t>
+            </a:r>
+          </a:p>
+        </p:txBody>
+      </p:sp>
+      <p:sp>
+        <p:nvSpPr>
+          <p:cNvPr id="37" name="TextBox 36"/>
+          <p:cNvSpPr txBox="1"/>
+          <p:nvPr/>
+        </p:nvSpPr>
+        <p:spPr>
+          <a:xfrm>
+            <a:off x="10287000" y="6534150"/>
+            <a:ext cx="1619250" cy="266700"/>
           </a:xfrm>
           <a:prstGeom prst="rect">
             <a:avLst/>
@@ -20983,1107 +22645,6 @@
               </a:lnSpc>
             </a:pPr>
             <a:r>
-              <a:rPr sz="1100" b="0">
-                <a:solidFill>
-                  <a:srgbClr val="94A3B8"/>
-                </a:solidFill>
-                <a:latin typeface="PingFang SC"/>
-              </a:rPr>
-              <a:t>跨 Server=Loop 的主场</a:t>
-            </a:r>
-          </a:p>
-        </p:txBody>
-      </p:sp>
-      <p:sp>
-        <p:nvSpPr>
-          <p:cNvPr id="6" name="Rounded Rectangle 5"/>
-          <p:cNvSpPr/>
-          <p:nvPr/>
-        </p:nvSpPr>
-        <p:spPr>
-          <a:xfrm>
-            <a:off x="1847850" y="914400"/>
-            <a:ext cx="8877300" cy="1100137"/>
-          </a:xfrm>
-          <a:prstGeom prst="roundRect">
-            <a:avLst>
-              <a:gd name="adj" fmla="val 8000"/>
-            </a:avLst>
-          </a:prstGeom>
-          <a:solidFill>
-            <a:srgbClr val="F1F5F9"/>
-          </a:solidFill>
-          <a:ln>
-            <a:noFill/>
-          </a:ln>
-          <a:effectLst/>
-        </p:spPr>
-        <p:style>
-          <a:lnRef idx="1">
-            <a:schemeClr val="accent1"/>
-          </a:lnRef>
-          <a:fillRef idx="3">
-            <a:schemeClr val="accent1"/>
-          </a:fillRef>
-          <a:effectRef idx="2">
-            <a:schemeClr val="accent1"/>
-          </a:effectRef>
-          <a:fontRef idx="minor">
-            <a:schemeClr val="lt1"/>
-          </a:fontRef>
-        </p:style>
-        <p:txBody>
-          <a:bodyPr rtlCol="0" anchor="ctr"/>
-          <a:lstStyle/>
-          <a:p>
-            <a:pPr algn="ctr"/>
-          </a:p>
-        </p:txBody>
-      </p:sp>
-      <p:sp>
-        <p:nvSpPr>
-          <p:cNvPr id="7" name="Rounded Rectangle 6"/>
-          <p:cNvSpPr/>
-          <p:nvPr/>
-        </p:nvSpPr>
-        <p:spPr>
-          <a:xfrm>
-            <a:off x="1905000" y="952500"/>
-            <a:ext cx="8763000" cy="1023937"/>
-          </a:xfrm>
-          <a:prstGeom prst="roundRect">
-            <a:avLst>
-              <a:gd name="adj" fmla="val 8000"/>
-            </a:avLst>
-          </a:prstGeom>
-          <a:solidFill>
-            <a:srgbClr val="FFFFFF"/>
-          </a:solidFill>
-          <a:ln w="12700">
-            <a:solidFill>
-              <a:srgbClr val="2563EB"/>
-            </a:solidFill>
-          </a:ln>
-          <a:effectLst/>
-        </p:spPr>
-        <p:style>
-          <a:lnRef idx="1">
-            <a:schemeClr val="accent1"/>
-          </a:lnRef>
-          <a:fillRef idx="3">
-            <a:schemeClr val="accent1"/>
-          </a:fillRef>
-          <a:effectRef idx="2">
-            <a:schemeClr val="accent1"/>
-          </a:effectRef>
-          <a:fontRef idx="minor">
-            <a:schemeClr val="lt1"/>
-          </a:fontRef>
-        </p:style>
-        <p:txBody>
-          <a:bodyPr rtlCol="0" anchor="ctr"/>
-          <a:lstStyle/>
-          <a:p>
-            <a:pPr algn="ctr"/>
-          </a:p>
-        </p:txBody>
-      </p:sp>
-      <p:sp>
-        <p:nvSpPr>
-          <p:cNvPr id="8" name="Rectangle 7"/>
-          <p:cNvSpPr/>
-          <p:nvPr/>
-        </p:nvSpPr>
-        <p:spPr>
-          <a:xfrm>
-            <a:off x="1905000" y="952500"/>
-            <a:ext cx="47625" cy="1023937"/>
-          </a:xfrm>
-          <a:prstGeom prst="rect">
-            <a:avLst/>
-          </a:prstGeom>
-          <a:solidFill>
-            <a:srgbClr val="2563EB"/>
-          </a:solidFill>
-          <a:ln>
-            <a:noFill/>
-          </a:ln>
-          <a:effectLst/>
-        </p:spPr>
-        <p:style>
-          <a:lnRef idx="1">
-            <a:schemeClr val="accent1"/>
-          </a:lnRef>
-          <a:fillRef idx="3">
-            <a:schemeClr val="accent1"/>
-          </a:fillRef>
-          <a:effectRef idx="2">
-            <a:schemeClr val="accent1"/>
-          </a:effectRef>
-          <a:fontRef idx="minor">
-            <a:schemeClr val="lt1"/>
-          </a:fontRef>
-        </p:style>
-        <p:txBody>
-          <a:bodyPr rtlCol="0" anchor="ctr"/>
-          <a:lstStyle/>
-          <a:p>
-            <a:pPr algn="ctr"/>
-          </a:p>
-        </p:txBody>
-      </p:sp>
-      <p:sp>
-        <p:nvSpPr>
-          <p:cNvPr id="9" name="TextBox 8"/>
-          <p:cNvSpPr txBox="1"/>
-          <p:nvPr/>
-        </p:nvSpPr>
-        <p:spPr>
-          <a:xfrm>
-            <a:off x="2038350" y="952500"/>
-            <a:ext cx="8534400" cy="1023937"/>
-          </a:xfrm>
-          <a:prstGeom prst="rect">
-            <a:avLst/>
-          </a:prstGeom>
-          <a:noFill/>
-        </p:spPr>
-        <p:txBody>
-          <a:bodyPr wrap="square" anchor="ctr">
-            <a:spAutoFit/>
-          </a:bodyPr>
-          <a:lstStyle/>
-          <a:p>
-            <a:pPr algn="l">
-              <a:lnSpc>
-                <a:spcPct val="100000"/>
-              </a:lnSpc>
-            </a:pPr>
-            <a:r>
-              <a:rPr sz="1200" b="1">
-                <a:solidFill>
-                  <a:srgbClr val="475569"/>
-                </a:solidFill>
-                <a:latin typeface="PingFang SC"/>
-              </a:rPr>
-              <a:t>Agent Loop:任务分解</a:t>
-            </a:r>
-          </a:p>
-        </p:txBody>
-      </p:sp>
-      <p:cxnSp>
-        <p:nvCxnSpPr>
-          <p:cNvPr id="10" name="Connector 9"/>
-          <p:cNvCxnSpPr/>
-          <p:nvPr/>
-        </p:nvCxnSpPr>
-        <p:spPr>
-          <a:xfrm>
-            <a:off x="6096000" y="2033587"/>
-            <a:ext cx="0" cy="152400"/>
-          </a:xfrm>
-          <a:prstGeom prst="line">
-            <a:avLst/>
-          </a:prstGeom>
-          <a:ln w="15240">
-            <a:solidFill>
-              <a:srgbClr val="94A3B8"/>
-            </a:solidFill>
-          </a:ln>
-        </p:spPr>
-        <p:style>
-          <a:lnRef idx="2">
-            <a:schemeClr val="accent1"/>
-          </a:lnRef>
-          <a:fillRef idx="0">
-            <a:schemeClr val="accent1"/>
-          </a:fillRef>
-          <a:effectRef idx="1">
-            <a:schemeClr val="accent1"/>
-          </a:effectRef>
-          <a:fontRef idx="minor">
-            <a:schemeClr val="tx1"/>
-          </a:fontRef>
-        </p:style>
-      </p:cxnSp>
-      <p:sp>
-        <p:nvSpPr>
-          <p:cNvPr id="11" name="Isosceles Triangle 10"/>
-          <p:cNvSpPr/>
-          <p:nvPr/>
-        </p:nvSpPr>
-        <p:spPr>
-          <a:xfrm rot="10800000">
-            <a:off x="6053138" y="2100263"/>
-            <a:ext cx="85725" cy="85725"/>
-          </a:xfrm>
-          <a:prstGeom prst="triangle">
-            <a:avLst/>
-          </a:prstGeom>
-          <a:solidFill>
-            <a:srgbClr val="94A3B8"/>
-          </a:solidFill>
-          <a:ln>
-            <a:noFill/>
-          </a:ln>
-          <a:effectLst/>
-        </p:spPr>
-        <p:style>
-          <a:lnRef idx="1">
-            <a:schemeClr val="accent1"/>
-          </a:lnRef>
-          <a:fillRef idx="3">
-            <a:schemeClr val="accent1"/>
-          </a:fillRef>
-          <a:effectRef idx="2">
-            <a:schemeClr val="accent1"/>
-          </a:effectRef>
-          <a:fontRef idx="minor">
-            <a:schemeClr val="lt1"/>
-          </a:fontRef>
-        </p:style>
-        <p:txBody>
-          <a:bodyPr rtlCol="0" anchor="ctr"/>
-          <a:lstStyle/>
-          <a:p>
-            <a:pPr algn="ctr"/>
-          </a:p>
-        </p:txBody>
-      </p:sp>
-      <p:sp>
-        <p:nvSpPr>
-          <p:cNvPr id="12" name="TextBox 11"/>
-          <p:cNvSpPr txBox="1"/>
-          <p:nvPr/>
-        </p:nvSpPr>
-        <p:spPr>
-          <a:xfrm>
-            <a:off x="6248400" y="1976437"/>
-            <a:ext cx="2095500" cy="247650"/>
-          </a:xfrm>
-          <a:prstGeom prst="rect">
-            <a:avLst/>
-          </a:prstGeom>
-          <a:noFill/>
-        </p:spPr>
-        <p:txBody>
-          <a:bodyPr wrap="square" anchor="ctr">
-            <a:spAutoFit/>
-          </a:bodyPr>
-          <a:lstStyle/>
-          <a:p>
-            <a:pPr algn="l">
-              <a:lnSpc>
-                <a:spcPct val="100000"/>
-              </a:lnSpc>
-            </a:pPr>
-            <a:r>
-              <a:rPr sz="1000" b="0">
-                <a:solidFill>
-                  <a:srgbClr val="94A3B8"/>
-                </a:solidFill>
-                <a:latin typeface="PingFang SC"/>
-              </a:rPr>
-              <a:t>读</a:t>
-            </a:r>
-          </a:p>
-        </p:txBody>
-      </p:sp>
-      <p:sp>
-        <p:nvSpPr>
-          <p:cNvPr id="13" name="Rounded Rectangle 12"/>
-          <p:cNvSpPr/>
-          <p:nvPr/>
-        </p:nvSpPr>
-        <p:spPr>
-          <a:xfrm>
-            <a:off x="1847850" y="2185987"/>
-            <a:ext cx="8877300" cy="1100137"/>
-          </a:xfrm>
-          <a:prstGeom prst="roundRect">
-            <a:avLst>
-              <a:gd name="adj" fmla="val 8000"/>
-            </a:avLst>
-          </a:prstGeom>
-          <a:solidFill>
-            <a:srgbClr val="F1F5F9"/>
-          </a:solidFill>
-          <a:ln>
-            <a:noFill/>
-          </a:ln>
-          <a:effectLst/>
-        </p:spPr>
-        <p:style>
-          <a:lnRef idx="1">
-            <a:schemeClr val="accent1"/>
-          </a:lnRef>
-          <a:fillRef idx="3">
-            <a:schemeClr val="accent1"/>
-          </a:fillRef>
-          <a:effectRef idx="2">
-            <a:schemeClr val="accent1"/>
-          </a:effectRef>
-          <a:fontRef idx="minor">
-            <a:schemeClr val="lt1"/>
-          </a:fontRef>
-        </p:style>
-        <p:txBody>
-          <a:bodyPr rtlCol="0" anchor="ctr"/>
-          <a:lstStyle/>
-          <a:p>
-            <a:pPr algn="ctr"/>
-          </a:p>
-        </p:txBody>
-      </p:sp>
-      <p:sp>
-        <p:nvSpPr>
-          <p:cNvPr id="14" name="Rounded Rectangle 13"/>
-          <p:cNvSpPr/>
-          <p:nvPr/>
-        </p:nvSpPr>
-        <p:spPr>
-          <a:xfrm>
-            <a:off x="1905000" y="2224087"/>
-            <a:ext cx="8763000" cy="1023937"/>
-          </a:xfrm>
-          <a:prstGeom prst="roundRect">
-            <a:avLst>
-              <a:gd name="adj" fmla="val 8000"/>
-            </a:avLst>
-          </a:prstGeom>
-          <a:solidFill>
-            <a:srgbClr val="FFFFFF"/>
-          </a:solidFill>
-          <a:ln w="12700">
-            <a:solidFill>
-              <a:srgbClr val="14B8A6"/>
-            </a:solidFill>
-          </a:ln>
-          <a:effectLst/>
-        </p:spPr>
-        <p:style>
-          <a:lnRef idx="1">
-            <a:schemeClr val="accent1"/>
-          </a:lnRef>
-          <a:fillRef idx="3">
-            <a:schemeClr val="accent1"/>
-          </a:fillRef>
-          <a:effectRef idx="2">
-            <a:schemeClr val="accent1"/>
-          </a:effectRef>
-          <a:fontRef idx="minor">
-            <a:schemeClr val="lt1"/>
-          </a:fontRef>
-        </p:style>
-        <p:txBody>
-          <a:bodyPr rtlCol="0" anchor="ctr"/>
-          <a:lstStyle/>
-          <a:p>
-            <a:pPr algn="ctr"/>
-          </a:p>
-        </p:txBody>
-      </p:sp>
-      <p:sp>
-        <p:nvSpPr>
-          <p:cNvPr id="15" name="Rectangle 14"/>
-          <p:cNvSpPr/>
-          <p:nvPr/>
-        </p:nvSpPr>
-        <p:spPr>
-          <a:xfrm>
-            <a:off x="1905000" y="2224087"/>
-            <a:ext cx="47625" cy="1023937"/>
-          </a:xfrm>
-          <a:prstGeom prst="rect">
-            <a:avLst/>
-          </a:prstGeom>
-          <a:solidFill>
-            <a:srgbClr val="14B8A6"/>
-          </a:solidFill>
-          <a:ln>
-            <a:noFill/>
-          </a:ln>
-          <a:effectLst/>
-        </p:spPr>
-        <p:style>
-          <a:lnRef idx="1">
-            <a:schemeClr val="accent1"/>
-          </a:lnRef>
-          <a:fillRef idx="3">
-            <a:schemeClr val="accent1"/>
-          </a:fillRef>
-          <a:effectRef idx="2">
-            <a:schemeClr val="accent1"/>
-          </a:effectRef>
-          <a:fontRef idx="minor">
-            <a:schemeClr val="lt1"/>
-          </a:fontRef>
-        </p:style>
-        <p:txBody>
-          <a:bodyPr rtlCol="0" anchor="ctr"/>
-          <a:lstStyle/>
-          <a:p>
-            <a:pPr algn="ctr"/>
-          </a:p>
-        </p:txBody>
-      </p:sp>
-      <p:sp>
-        <p:nvSpPr>
-          <p:cNvPr id="16" name="TextBox 15"/>
-          <p:cNvSpPr txBox="1"/>
-          <p:nvPr/>
-        </p:nvSpPr>
-        <p:spPr>
-          <a:xfrm>
-            <a:off x="2038350" y="2224087"/>
-            <a:ext cx="8534400" cy="1023937"/>
-          </a:xfrm>
-          <a:prstGeom prst="rect">
-            <a:avLst/>
-          </a:prstGeom>
-          <a:noFill/>
-        </p:spPr>
-        <p:txBody>
-          <a:bodyPr wrap="square" anchor="ctr">
-            <a:spAutoFit/>
-          </a:bodyPr>
-          <a:lstStyle/>
-          <a:p>
-            <a:pPr algn="l">
-              <a:lnSpc>
-                <a:spcPct val="100000"/>
-              </a:lnSpc>
-            </a:pPr>
-            <a:r>
-              <a:rPr sz="1200" b="1">
-                <a:solidFill>
-                  <a:srgbClr val="475569"/>
-                </a:solidFill>
-                <a:latin typeface="PingFang SC"/>
-              </a:rPr>
-              <a:t>文件 Server:读需求(路径白名单)</a:t>
-            </a:r>
-          </a:p>
-        </p:txBody>
-      </p:sp>
-      <p:cxnSp>
-        <p:nvCxnSpPr>
-          <p:cNvPr id="17" name="Connector 16"/>
-          <p:cNvCxnSpPr/>
-          <p:nvPr/>
-        </p:nvCxnSpPr>
-        <p:spPr>
-          <a:xfrm>
-            <a:off x="6096000" y="3305174"/>
-            <a:ext cx="0" cy="152400"/>
-          </a:xfrm>
-          <a:prstGeom prst="line">
-            <a:avLst/>
-          </a:prstGeom>
-          <a:ln w="15240">
-            <a:solidFill>
-              <a:srgbClr val="94A3B8"/>
-            </a:solidFill>
-          </a:ln>
-        </p:spPr>
-        <p:style>
-          <a:lnRef idx="2">
-            <a:schemeClr val="accent1"/>
-          </a:lnRef>
-          <a:fillRef idx="0">
-            <a:schemeClr val="accent1"/>
-          </a:fillRef>
-          <a:effectRef idx="1">
-            <a:schemeClr val="accent1"/>
-          </a:effectRef>
-          <a:fontRef idx="minor">
-            <a:schemeClr val="tx1"/>
-          </a:fontRef>
-        </p:style>
-      </p:cxnSp>
-      <p:sp>
-        <p:nvSpPr>
-          <p:cNvPr id="18" name="Isosceles Triangle 17"/>
-          <p:cNvSpPr/>
-          <p:nvPr/>
-        </p:nvSpPr>
-        <p:spPr>
-          <a:xfrm rot="10800000">
-            <a:off x="6053138" y="3371850"/>
-            <a:ext cx="85725" cy="85725"/>
-          </a:xfrm>
-          <a:prstGeom prst="triangle">
-            <a:avLst/>
-          </a:prstGeom>
-          <a:solidFill>
-            <a:srgbClr val="94A3B8"/>
-          </a:solidFill>
-          <a:ln>
-            <a:noFill/>
-          </a:ln>
-          <a:effectLst/>
-        </p:spPr>
-        <p:style>
-          <a:lnRef idx="1">
-            <a:schemeClr val="accent1"/>
-          </a:lnRef>
-          <a:fillRef idx="3">
-            <a:schemeClr val="accent1"/>
-          </a:fillRef>
-          <a:effectRef idx="2">
-            <a:schemeClr val="accent1"/>
-          </a:effectRef>
-          <a:fontRef idx="minor">
-            <a:schemeClr val="lt1"/>
-          </a:fontRef>
-        </p:style>
-        <p:txBody>
-          <a:bodyPr rtlCol="0" anchor="ctr"/>
-          <a:lstStyle/>
-          <a:p>
-            <a:pPr algn="ctr"/>
-          </a:p>
-        </p:txBody>
-      </p:sp>
-      <p:sp>
-        <p:nvSpPr>
-          <p:cNvPr id="19" name="TextBox 18"/>
-          <p:cNvSpPr txBox="1"/>
-          <p:nvPr/>
-        </p:nvSpPr>
-        <p:spPr>
-          <a:xfrm>
-            <a:off x="6248400" y="3248024"/>
-            <a:ext cx="2095500" cy="247650"/>
-          </a:xfrm>
-          <a:prstGeom prst="rect">
-            <a:avLst/>
-          </a:prstGeom>
-          <a:noFill/>
-        </p:spPr>
-        <p:txBody>
-          <a:bodyPr wrap="square" anchor="ctr">
-            <a:spAutoFit/>
-          </a:bodyPr>
-          <a:lstStyle/>
-          <a:p>
-            <a:pPr algn="l">
-              <a:lnSpc>
-                <a:spcPct val="100000"/>
-              </a:lnSpc>
-            </a:pPr>
-            <a:r>
-              <a:rPr sz="1000" b="0">
-                <a:solidFill>
-                  <a:srgbClr val="94A3B8"/>
-                </a:solidFill>
-                <a:latin typeface="PingFang SC"/>
-              </a:rPr>
-              <a:t>查</a:t>
-            </a:r>
-          </a:p>
-        </p:txBody>
-      </p:sp>
-      <p:sp>
-        <p:nvSpPr>
-          <p:cNvPr id="20" name="Rounded Rectangle 19"/>
-          <p:cNvSpPr/>
-          <p:nvPr/>
-        </p:nvSpPr>
-        <p:spPr>
-          <a:xfrm>
-            <a:off x="1847850" y="3457574"/>
-            <a:ext cx="8877300" cy="1100137"/>
-          </a:xfrm>
-          <a:prstGeom prst="roundRect">
-            <a:avLst>
-              <a:gd name="adj" fmla="val 8000"/>
-            </a:avLst>
-          </a:prstGeom>
-          <a:solidFill>
-            <a:srgbClr val="F1F5F9"/>
-          </a:solidFill>
-          <a:ln>
-            <a:noFill/>
-          </a:ln>
-          <a:effectLst/>
-        </p:spPr>
-        <p:style>
-          <a:lnRef idx="1">
-            <a:schemeClr val="accent1"/>
-          </a:lnRef>
-          <a:fillRef idx="3">
-            <a:schemeClr val="accent1"/>
-          </a:fillRef>
-          <a:effectRef idx="2">
-            <a:schemeClr val="accent1"/>
-          </a:effectRef>
-          <a:fontRef idx="minor">
-            <a:schemeClr val="lt1"/>
-          </a:fontRef>
-        </p:style>
-        <p:txBody>
-          <a:bodyPr rtlCol="0" anchor="ctr"/>
-          <a:lstStyle/>
-          <a:p>
-            <a:pPr algn="ctr"/>
-          </a:p>
-        </p:txBody>
-      </p:sp>
-      <p:sp>
-        <p:nvSpPr>
-          <p:cNvPr id="21" name="Rounded Rectangle 20"/>
-          <p:cNvSpPr/>
-          <p:nvPr/>
-        </p:nvSpPr>
-        <p:spPr>
-          <a:xfrm>
-            <a:off x="1905000" y="3495674"/>
-            <a:ext cx="8763000" cy="1023937"/>
-          </a:xfrm>
-          <a:prstGeom prst="roundRect">
-            <a:avLst>
-              <a:gd name="adj" fmla="val 8000"/>
-            </a:avLst>
-          </a:prstGeom>
-          <a:solidFill>
-            <a:srgbClr val="FFFFFF"/>
-          </a:solidFill>
-          <a:ln w="12700">
-            <a:solidFill>
-              <a:srgbClr val="8B5CF6"/>
-            </a:solidFill>
-          </a:ln>
-          <a:effectLst/>
-        </p:spPr>
-        <p:style>
-          <a:lnRef idx="1">
-            <a:schemeClr val="accent1"/>
-          </a:lnRef>
-          <a:fillRef idx="3">
-            <a:schemeClr val="accent1"/>
-          </a:fillRef>
-          <a:effectRef idx="2">
-            <a:schemeClr val="accent1"/>
-          </a:effectRef>
-          <a:fontRef idx="minor">
-            <a:schemeClr val="lt1"/>
-          </a:fontRef>
-        </p:style>
-        <p:txBody>
-          <a:bodyPr rtlCol="0" anchor="ctr"/>
-          <a:lstStyle/>
-          <a:p>
-            <a:pPr algn="ctr"/>
-          </a:p>
-        </p:txBody>
-      </p:sp>
-      <p:sp>
-        <p:nvSpPr>
-          <p:cNvPr id="22" name="Rectangle 21"/>
-          <p:cNvSpPr/>
-          <p:nvPr/>
-        </p:nvSpPr>
-        <p:spPr>
-          <a:xfrm>
-            <a:off x="1905000" y="3495674"/>
-            <a:ext cx="47625" cy="1023937"/>
-          </a:xfrm>
-          <a:prstGeom prst="rect">
-            <a:avLst/>
-          </a:prstGeom>
-          <a:solidFill>
-            <a:srgbClr val="8B5CF6"/>
-          </a:solidFill>
-          <a:ln>
-            <a:noFill/>
-          </a:ln>
-          <a:effectLst/>
-        </p:spPr>
-        <p:style>
-          <a:lnRef idx="1">
-            <a:schemeClr val="accent1"/>
-          </a:lnRef>
-          <a:fillRef idx="3">
-            <a:schemeClr val="accent1"/>
-          </a:fillRef>
-          <a:effectRef idx="2">
-            <a:schemeClr val="accent1"/>
-          </a:effectRef>
-          <a:fontRef idx="minor">
-            <a:schemeClr val="lt1"/>
-          </a:fontRef>
-        </p:style>
-        <p:txBody>
-          <a:bodyPr rtlCol="0" anchor="ctr"/>
-          <a:lstStyle/>
-          <a:p>
-            <a:pPr algn="ctr"/>
-          </a:p>
-        </p:txBody>
-      </p:sp>
-      <p:sp>
-        <p:nvSpPr>
-          <p:cNvPr id="23" name="TextBox 22"/>
-          <p:cNvSpPr txBox="1"/>
-          <p:nvPr/>
-        </p:nvSpPr>
-        <p:spPr>
-          <a:xfrm>
-            <a:off x="2038350" y="3495674"/>
-            <a:ext cx="8534400" cy="1023937"/>
-          </a:xfrm>
-          <a:prstGeom prst="rect">
-            <a:avLst/>
-          </a:prstGeom>
-          <a:noFill/>
-        </p:spPr>
-        <p:txBody>
-          <a:bodyPr wrap="square" anchor="ctr">
-            <a:spAutoFit/>
-          </a:bodyPr>
-          <a:lstStyle/>
-          <a:p>
-            <a:pPr algn="l">
-              <a:lnSpc>
-                <a:spcPct val="100000"/>
-              </a:lnSpc>
-            </a:pPr>
-            <a:r>
-              <a:rPr sz="1200" b="1">
-                <a:solidFill>
-                  <a:srgbClr val="475569"/>
-                </a:solidFill>
-                <a:latin typeface="PingFang SC"/>
-              </a:rPr>
-              <a:t>DB Server:查数据(只读)</a:t>
-            </a:r>
-          </a:p>
-        </p:txBody>
-      </p:sp>
-      <p:cxnSp>
-        <p:nvCxnSpPr>
-          <p:cNvPr id="24" name="Connector 23"/>
-          <p:cNvCxnSpPr/>
-          <p:nvPr/>
-        </p:nvCxnSpPr>
-        <p:spPr>
-          <a:xfrm>
-            <a:off x="6096000" y="4576761"/>
-            <a:ext cx="0" cy="152400"/>
-          </a:xfrm>
-          <a:prstGeom prst="line">
-            <a:avLst/>
-          </a:prstGeom>
-          <a:ln w="15240">
-            <a:solidFill>
-              <a:srgbClr val="94A3B8"/>
-            </a:solidFill>
-          </a:ln>
-        </p:spPr>
-        <p:style>
-          <a:lnRef idx="2">
-            <a:schemeClr val="accent1"/>
-          </a:lnRef>
-          <a:fillRef idx="0">
-            <a:schemeClr val="accent1"/>
-          </a:fillRef>
-          <a:effectRef idx="1">
-            <a:schemeClr val="accent1"/>
-          </a:effectRef>
-          <a:fontRef idx="minor">
-            <a:schemeClr val="tx1"/>
-          </a:fontRef>
-        </p:style>
-      </p:cxnSp>
-      <p:sp>
-        <p:nvSpPr>
-          <p:cNvPr id="25" name="Isosceles Triangle 24"/>
-          <p:cNvSpPr/>
-          <p:nvPr/>
-        </p:nvSpPr>
-        <p:spPr>
-          <a:xfrm rot="10800000">
-            <a:off x="6053138" y="4643437"/>
-            <a:ext cx="85725" cy="85725"/>
-          </a:xfrm>
-          <a:prstGeom prst="triangle">
-            <a:avLst/>
-          </a:prstGeom>
-          <a:solidFill>
-            <a:srgbClr val="94A3B8"/>
-          </a:solidFill>
-          <a:ln>
-            <a:noFill/>
-          </a:ln>
-          <a:effectLst/>
-        </p:spPr>
-        <p:style>
-          <a:lnRef idx="1">
-            <a:schemeClr val="accent1"/>
-          </a:lnRef>
-          <a:fillRef idx="3">
-            <a:schemeClr val="accent1"/>
-          </a:fillRef>
-          <a:effectRef idx="2">
-            <a:schemeClr val="accent1"/>
-          </a:effectRef>
-          <a:fontRef idx="minor">
-            <a:schemeClr val="lt1"/>
-          </a:fontRef>
-        </p:style>
-        <p:txBody>
-          <a:bodyPr rtlCol="0" anchor="ctr"/>
-          <a:lstStyle/>
-          <a:p>
-            <a:pPr algn="ctr"/>
-          </a:p>
-        </p:txBody>
-      </p:sp>
-      <p:sp>
-        <p:nvSpPr>
-          <p:cNvPr id="26" name="TextBox 25"/>
-          <p:cNvSpPr txBox="1"/>
-          <p:nvPr/>
-        </p:nvSpPr>
-        <p:spPr>
-          <a:xfrm>
-            <a:off x="6248400" y="4519611"/>
-            <a:ext cx="2095500" cy="247650"/>
-          </a:xfrm>
-          <a:prstGeom prst="rect">
-            <a:avLst/>
-          </a:prstGeom>
-          <a:noFill/>
-        </p:spPr>
-        <p:txBody>
-          <a:bodyPr wrap="square" anchor="ctr">
-            <a:spAutoFit/>
-          </a:bodyPr>
-          <a:lstStyle/>
-          <a:p>
-            <a:pPr algn="l">
-              <a:lnSpc>
-                <a:spcPct val="100000"/>
-              </a:lnSpc>
-            </a:pPr>
-            <a:r>
-              <a:rPr sz="1000" b="0">
-                <a:solidFill>
-                  <a:srgbClr val="94A3B8"/>
-                </a:solidFill>
-                <a:latin typeface="PingFang SC"/>
-              </a:rPr>
-              <a:t>交付</a:t>
-            </a:r>
-          </a:p>
-        </p:txBody>
-      </p:sp>
-      <p:sp>
-        <p:nvSpPr>
-          <p:cNvPr id="27" name="Rounded Rectangle 26"/>
-          <p:cNvSpPr/>
-          <p:nvPr/>
-        </p:nvSpPr>
-        <p:spPr>
-          <a:xfrm>
-            <a:off x="1847850" y="4729161"/>
-            <a:ext cx="8877300" cy="1100137"/>
-          </a:xfrm>
-          <a:prstGeom prst="roundRect">
-            <a:avLst>
-              <a:gd name="adj" fmla="val 8000"/>
-            </a:avLst>
-          </a:prstGeom>
-          <a:solidFill>
-            <a:srgbClr val="F1F5F9"/>
-          </a:solidFill>
-          <a:ln>
-            <a:noFill/>
-          </a:ln>
-          <a:effectLst/>
-        </p:spPr>
-        <p:style>
-          <a:lnRef idx="1">
-            <a:schemeClr val="accent1"/>
-          </a:lnRef>
-          <a:fillRef idx="3">
-            <a:schemeClr val="accent1"/>
-          </a:fillRef>
-          <a:effectRef idx="2">
-            <a:schemeClr val="accent1"/>
-          </a:effectRef>
-          <a:fontRef idx="minor">
-            <a:schemeClr val="lt1"/>
-          </a:fontRef>
-        </p:style>
-        <p:txBody>
-          <a:bodyPr rtlCol="0" anchor="ctr"/>
-          <a:lstStyle/>
-          <a:p>
-            <a:pPr algn="ctr"/>
-          </a:p>
-        </p:txBody>
-      </p:sp>
-      <p:sp>
-        <p:nvSpPr>
-          <p:cNvPr id="28" name="Rounded Rectangle 27"/>
-          <p:cNvSpPr/>
-          <p:nvPr/>
-        </p:nvSpPr>
-        <p:spPr>
-          <a:xfrm>
-            <a:off x="1905000" y="4767261"/>
-            <a:ext cx="8763000" cy="1023937"/>
-          </a:xfrm>
-          <a:prstGeom prst="roundRect">
-            <a:avLst>
-              <a:gd name="adj" fmla="val 8000"/>
-            </a:avLst>
-          </a:prstGeom>
-          <a:solidFill>
-            <a:srgbClr val="FFFFFF"/>
-          </a:solidFill>
-          <a:ln w="12700">
-            <a:solidFill>
-              <a:srgbClr val="F59E0B"/>
-            </a:solidFill>
-          </a:ln>
-          <a:effectLst/>
-        </p:spPr>
-        <p:style>
-          <a:lnRef idx="1">
-            <a:schemeClr val="accent1"/>
-          </a:lnRef>
-          <a:fillRef idx="3">
-            <a:schemeClr val="accent1"/>
-          </a:fillRef>
-          <a:effectRef idx="2">
-            <a:schemeClr val="accent1"/>
-          </a:effectRef>
-          <a:fontRef idx="minor">
-            <a:schemeClr val="lt1"/>
-          </a:fontRef>
-        </p:style>
-        <p:txBody>
-          <a:bodyPr rtlCol="0" anchor="ctr"/>
-          <a:lstStyle/>
-          <a:p>
-            <a:pPr algn="ctr"/>
-          </a:p>
-        </p:txBody>
-      </p:sp>
-      <p:sp>
-        <p:nvSpPr>
-          <p:cNvPr id="29" name="Rectangle 28"/>
-          <p:cNvSpPr/>
-          <p:nvPr/>
-        </p:nvSpPr>
-        <p:spPr>
-          <a:xfrm>
-            <a:off x="1905000" y="4767261"/>
-            <a:ext cx="47625" cy="1023937"/>
-          </a:xfrm>
-          <a:prstGeom prst="rect">
-            <a:avLst/>
-          </a:prstGeom>
-          <a:solidFill>
-            <a:srgbClr val="F59E0B"/>
-          </a:solidFill>
-          <a:ln>
-            <a:noFill/>
-          </a:ln>
-          <a:effectLst/>
-        </p:spPr>
-        <p:style>
-          <a:lnRef idx="1">
-            <a:schemeClr val="accent1"/>
-          </a:lnRef>
-          <a:fillRef idx="3">
-            <a:schemeClr val="accent1"/>
-          </a:fillRef>
-          <a:effectRef idx="2">
-            <a:schemeClr val="accent1"/>
-          </a:effectRef>
-          <a:fontRef idx="minor">
-            <a:schemeClr val="lt1"/>
-          </a:fontRef>
-        </p:style>
-        <p:txBody>
-          <a:bodyPr rtlCol="0" anchor="ctr"/>
-          <a:lstStyle/>
-          <a:p>
-            <a:pPr algn="ctr"/>
-          </a:p>
-        </p:txBody>
-      </p:sp>
-      <p:sp>
-        <p:nvSpPr>
-          <p:cNvPr id="30" name="TextBox 29"/>
-          <p:cNvSpPr txBox="1"/>
-          <p:nvPr/>
-        </p:nvSpPr>
-        <p:spPr>
-          <a:xfrm>
-            <a:off x="2038350" y="4767261"/>
-            <a:ext cx="8534400" cy="1023937"/>
-          </a:xfrm>
-          <a:prstGeom prst="rect">
-            <a:avLst/>
-          </a:prstGeom>
-          <a:noFill/>
-        </p:spPr>
-        <p:txBody>
-          <a:bodyPr wrap="square" anchor="ctr">
-            <a:spAutoFit/>
-          </a:bodyPr>
-          <a:lstStyle/>
-          <a:p>
-            <a:pPr algn="l">
-              <a:lnSpc>
-                <a:spcPct val="100000"/>
-              </a:lnSpc>
-            </a:pPr>
-            <a:r>
-              <a:rPr sz="1200" b="1">
-                <a:solidFill>
-                  <a:srgbClr val="475569"/>
-                </a:solidFill>
-                <a:latin typeface="PingFang SC"/>
-              </a:rPr>
-              <a:t>GitHub Server:提 PR(Token 最小权)|跨 Server=Loop 的主场</a:t>
-            </a:r>
-          </a:p>
-        </p:txBody>
-      </p:sp>
-      <p:sp>
-        <p:nvSpPr>
-          <p:cNvPr id="31" name="TextBox 30"/>
-          <p:cNvSpPr txBox="1"/>
-          <p:nvPr/>
-        </p:nvSpPr>
-        <p:spPr>
-          <a:xfrm>
-            <a:off x="10287000" y="6534150"/>
-            <a:ext cx="1619250" cy="266700"/>
-          </a:xfrm>
-          <a:prstGeom prst="rect">
-            <a:avLst/>
-          </a:prstGeom>
-          <a:noFill/>
-        </p:spPr>
-        <p:txBody>
-          <a:bodyPr wrap="square" anchor="ctr">
-            <a:spAutoFit/>
-          </a:bodyPr>
-          <a:lstStyle/>
-          <a:p>
-            <a:pPr algn="r">
-              <a:lnSpc>
-                <a:spcPct val="100000"/>
-              </a:lnSpc>
-            </a:pPr>
-            <a:r>
               <a:rPr sz="900" b="0">
                 <a:solidFill>
                   <a:srgbClr val="94A3B8"/>
@@ -22097,7 +22658,7 @@
       </p:sp>
       <p:sp>
         <p:nvSpPr>
-          <p:cNvPr id="32" name="TextBox 31"/>
+          <p:cNvPr id="38" name="TextBox 37"/>
           <p:cNvSpPr txBox="1"/>
           <p:nvPr/>
         </p:nvSpPr>
@@ -29525,7 +30086,7 @@
                 </a:solidFill>
                 <a:latin typeface="PingFang SC"/>
               </a:rPr>
-              <a:t>PulsarAuditBus+三层权限|与 OWASP LLM Top10 联动</a:t>
+              <a:t>PulsarAuditBus+三层权限</a:t>
             </a:r>
           </a:p>
         </p:txBody>
@@ -30940,7 +31501,7 @@
                 </a:solidFill>
                 <a:latin typeface="PingFang SC"/>
               </a:rPr>
-              <a:t>6. 观察回灌|三层权限:Server/工具/参数</a:t>
+              <a:t>6. 观察回灌</a:t>
             </a:r>
           </a:p>
         </p:txBody>

--- a/03-课件PPT/讲次版/第2章-4-讲次 2-4 · MCP 协议与接入.pptx
+++ b/03-课件PPT/讲次版/第2章-4-讲次 2-4 · MCP 协议与接入.pptx
@@ -6067,7 +6067,7 @@
           <a:noFill/>
         </p:spPr>
         <p:txBody>
-          <a:bodyPr wrap="none" anchor="ctr">
+          <a:bodyPr wrap="square" anchor="ctr">
             <a:spAutoFit/>
           </a:bodyPr>
           <a:lstStyle/>
@@ -6078,7 +6078,7 @@
               </a:lnSpc>
             </a:pPr>
             <a:r>
-              <a:rPr sz="900" b="1">
+              <a:rPr sz="1300" b="1">
                 <a:solidFill>
                   <a:srgbClr val="0B1D3A"/>
                 </a:solidFill>
@@ -6449,7 +6449,7 @@
           <a:noFill/>
         </p:spPr>
         <p:txBody>
-          <a:bodyPr wrap="none" anchor="ctr">
+          <a:bodyPr wrap="square" anchor="ctr">
             <a:spAutoFit/>
           </a:bodyPr>
           <a:lstStyle/>
@@ -6460,7 +6460,7 @@
               </a:lnSpc>
             </a:pPr>
             <a:r>
-              <a:rPr sz="1100" b="1">
+              <a:rPr sz="1300" b="1">
                 <a:solidFill>
                   <a:srgbClr val="0B1D3A"/>
                 </a:solidFill>
@@ -6580,7 +6580,7 @@
           <a:noFill/>
         </p:spPr>
         <p:txBody>
-          <a:bodyPr wrap="none" anchor="ctr">
+          <a:bodyPr wrap="square" anchor="ctr">
             <a:spAutoFit/>
           </a:bodyPr>
           <a:lstStyle/>
@@ -6711,7 +6711,7 @@
           <a:noFill/>
         </p:spPr>
         <p:txBody>
-          <a:bodyPr wrap="none" anchor="ctr">
+          <a:bodyPr wrap="square" anchor="ctr">
             <a:spAutoFit/>
           </a:bodyPr>
           <a:lstStyle/>
@@ -7093,7 +7093,7 @@
           <a:noFill/>
         </p:spPr>
         <p:txBody>
-          <a:bodyPr wrap="none" anchor="ctr">
+          <a:bodyPr wrap="square" anchor="ctr">
             <a:spAutoFit/>
           </a:bodyPr>
           <a:lstStyle/>
@@ -7104,7 +7104,7 @@
               </a:lnSpc>
             </a:pPr>
             <a:r>
-              <a:rPr sz="1100" b="1">
+              <a:rPr sz="1300" b="1">
                 <a:solidFill>
                   <a:srgbClr val="0B1D3A"/>
                 </a:solidFill>
@@ -7224,7 +7224,7 @@
           <a:noFill/>
         </p:spPr>
         <p:txBody>
-          <a:bodyPr wrap="none" anchor="ctr">
+          <a:bodyPr wrap="square" anchor="ctr">
             <a:spAutoFit/>
           </a:bodyPr>
           <a:lstStyle/>
@@ -7355,7 +7355,7 @@
           <a:noFill/>
         </p:spPr>
         <p:txBody>
-          <a:bodyPr wrap="none" anchor="ctr">
+          <a:bodyPr wrap="square" anchor="ctr">
             <a:spAutoFit/>
           </a:bodyPr>
           <a:lstStyle/>
@@ -7486,7 +7486,7 @@
           <a:noFill/>
         </p:spPr>
         <p:txBody>
-          <a:bodyPr wrap="none" anchor="ctr">
+          <a:bodyPr wrap="square" anchor="ctr">
             <a:spAutoFit/>
           </a:bodyPr>
           <a:lstStyle/>
@@ -7868,7 +7868,7 @@
           <a:noFill/>
         </p:spPr>
         <p:txBody>
-          <a:bodyPr wrap="none" anchor="ctr">
+          <a:bodyPr wrap="square" anchor="ctr">
             <a:spAutoFit/>
           </a:bodyPr>
           <a:lstStyle/>
@@ -7999,7 +7999,7 @@
           <a:noFill/>
         </p:spPr>
         <p:txBody>
-          <a:bodyPr wrap="none" anchor="ctr">
+          <a:bodyPr wrap="square" anchor="ctr">
             <a:spAutoFit/>
           </a:bodyPr>
           <a:lstStyle/>
@@ -8130,7 +8130,7 @@
           <a:noFill/>
         </p:spPr>
         <p:txBody>
-          <a:bodyPr wrap="none" anchor="ctr">
+          <a:bodyPr wrap="square" anchor="ctr">
             <a:spAutoFit/>
           </a:bodyPr>
           <a:lstStyle/>
@@ -21449,7 +21449,7 @@
           <a:noFill/>
         </p:spPr>
         <p:txBody>
-          <a:bodyPr wrap="none" anchor="ctr">
+          <a:bodyPr wrap="square" anchor="ctr">
             <a:spAutoFit/>
           </a:bodyPr>
           <a:lstStyle/>
@@ -21460,7 +21460,7 @@
               </a:lnSpc>
             </a:pPr>
             <a:r>
-              <a:rPr sz="1100" b="1">
+              <a:rPr sz="1300" b="1">
                 <a:solidFill>
                   <a:srgbClr val="0B1D3A"/>
                 </a:solidFill>
@@ -21831,7 +21831,7 @@
           <a:noFill/>
         </p:spPr>
         <p:txBody>
-          <a:bodyPr wrap="none" anchor="ctr">
+          <a:bodyPr wrap="square" anchor="ctr">
             <a:spAutoFit/>
           </a:bodyPr>
           <a:lstStyle/>
@@ -21842,7 +21842,7 @@
               </a:lnSpc>
             </a:pPr>
             <a:r>
-              <a:rPr sz="900" b="1">
+              <a:rPr sz="1300" b="1">
                 <a:solidFill>
                   <a:srgbClr val="0B1D3A"/>
                 </a:solidFill>
@@ -22213,7 +22213,7 @@
           <a:noFill/>
         </p:spPr>
         <p:txBody>
-          <a:bodyPr wrap="none" anchor="ctr">
+          <a:bodyPr wrap="square" anchor="ctr">
             <a:spAutoFit/>
           </a:bodyPr>
           <a:lstStyle/>
@@ -22224,7 +22224,7 @@
               </a:lnSpc>
             </a:pPr>
             <a:r>
-              <a:rPr sz="1100" b="1">
+              <a:rPr sz="1300" b="1">
                 <a:solidFill>
                   <a:srgbClr val="0B1D3A"/>
                 </a:solidFill>
@@ -22595,7 +22595,7 @@
           <a:noFill/>
         </p:spPr>
         <p:txBody>
-          <a:bodyPr wrap="none" anchor="ctr">
+          <a:bodyPr wrap="square" anchor="ctr">
             <a:spAutoFit/>
           </a:bodyPr>
           <a:lstStyle/>
@@ -22606,7 +22606,7 @@
               </a:lnSpc>
             </a:pPr>
             <a:r>
-              <a:rPr sz="900" b="1">
+              <a:rPr sz="1300" b="1">
                 <a:solidFill>
                   <a:srgbClr val="0B1D3A"/>
                 </a:solidFill>
